--- a/ppt/Midterm_Presentation.pptx
+++ b/ppt/Midterm_Presentation.pptx
@@ -27942,20 +27942,73 @@
       </p:grpSpPr>
       <p:sp>
         <p:nvSpPr>
-          <p:cNvPr id="2" name="Rectangle 1"/>
+          <p:cNvPr id="4" name="TextBox 3"/>
+          <p:cNvSpPr txBox="1"/>
+          <p:nvPr/>
+        </p:nvSpPr>
+        <p:spPr>
+          <a:xfrm>
+            <a:off x="685800" y="1046485"/>
+            <a:ext cx="10607040" cy="215444"/>
+          </a:xfrm>
+          <a:prstGeom prst="rect">
+            <a:avLst/>
+          </a:prstGeom>
+          <a:noFill/>
+        </p:spPr>
+        <p:txBody>
+          <a:bodyPr wrap="square" lIns="0" tIns="0" rIns="0" bIns="0" anchor="t">
+            <a:spAutoFit/>
+          </a:bodyPr>
+          <a:lstStyle>
+            <a:defPPr marR="0" lvl="0" algn="l" rtl="0">
+              <a:lnSpc>
+                <a:spcPct val="100000"/>
+              </a:lnSpc>
+              <a:spcBef>
+                <a:spcPts val="0"/>
+              </a:spcBef>
+              <a:spcAft>
+                <a:spcPts val="0"/>
+              </a:spcAft>
+              <a:defRPr/>
+            </a:defPPr>
+            <a:lvl1pPr>
+              <a:spcAft>
+                <a:spcPts val="200"/>
+              </a:spcAft>
+              <a:defRPr i="1">
+                <a:solidFill>
+                  <a:schemeClr val="bg2"/>
+                </a:solidFill>
+                <a:latin typeface="Calibri"/>
+              </a:defRPr>
+            </a:lvl1pPr>
+          </a:lstStyle>
+          <a:p>
+            <a:r>
+              <a:rPr dirty="0"/>
+              <a:t>Daily XAU/USD, 962 test windows, 3 seeds — honest walk-forward comparison</a:t>
+            </a:r>
+          </a:p>
+        </p:txBody>
+      </p:sp>
+      <p:sp>
+        <p:nvSpPr>
+          <p:cNvPr id="5" name="Rectangle 4"/>
           <p:cNvSpPr/>
           <p:nvPr/>
         </p:nvSpPr>
         <p:spPr>
           <a:xfrm>
-            <a:off x="566928" y="548640"/>
-            <a:ext cx="82296" cy="502920"/>
+            <a:off x="566927" y="1645920"/>
+            <a:ext cx="7227243" cy="566928"/>
           </a:xfrm>
           <a:prstGeom prst="rect">
             <a:avLst/>
           </a:prstGeom>
           <a:solidFill>
-            <a:srgbClr val="2DD4BF"/>
+            <a:srgbClr val="1E2738"/>
           </a:solidFill>
           <a:ln>
             <a:noFill/>
@@ -27987,14 +28040,14 @@
       </p:sp>
       <p:sp>
         <p:nvSpPr>
-          <p:cNvPr id="3" name="TextBox 2"/>
+          <p:cNvPr id="6" name="TextBox 5"/>
           <p:cNvSpPr txBox="1"/>
           <p:nvPr/>
         </p:nvSpPr>
         <p:spPr>
           <a:xfrm>
-            <a:off x="777240" y="475488"/>
-            <a:ext cx="10515600" cy="731520"/>
+            <a:off x="704088" y="1645920"/>
+            <a:ext cx="2560320" cy="566928"/>
           </a:xfrm>
           <a:prstGeom prst="rect">
             <a:avLst/>
@@ -28002,7 +28055,7 @@
           <a:noFill/>
         </p:spPr>
         <p:txBody>
-          <a:bodyPr wrap="square" lIns="0" tIns="0" rIns="0" bIns="0" anchor="t">
+          <a:bodyPr wrap="square" lIns="0" tIns="0" rIns="0" bIns="0" anchor="ctr">
             <a:spAutoFit/>
           </a:bodyPr>
           <a:lstStyle/>
@@ -28016,27 +28069,27 @@
               </a:spcAft>
             </a:pPr>
             <a:r>
-              <a:rPr sz="3200" b="1" i="0">
-                <a:solidFill>
-                  <a:srgbClr val="1F3759"/>
+              <a:rPr sz="1150" b="1" i="0">
+                <a:solidFill>
+                  <a:srgbClr val="FFFFFF"/>
                 </a:solidFill>
                 <a:latin typeface="Calibri"/>
               </a:rPr>
-              <a:t>Results, Discussion &amp; Benchmarks</a:t>
-            </a:r>
-          </a:p>
-        </p:txBody>
-      </p:sp>
-      <p:sp>
-        <p:nvSpPr>
-          <p:cNvPr id="4" name="TextBox 3"/>
+              <a:t>Model</a:t>
+            </a:r>
+          </a:p>
+        </p:txBody>
+      </p:sp>
+      <p:sp>
+        <p:nvSpPr>
+          <p:cNvPr id="7" name="TextBox 6"/>
           <p:cNvSpPr txBox="1"/>
           <p:nvPr/>
         </p:nvSpPr>
         <p:spPr>
           <a:xfrm>
-            <a:off x="777240" y="1170432"/>
-            <a:ext cx="10607040" cy="365760"/>
+            <a:off x="3447288" y="1645920"/>
+            <a:ext cx="822960" cy="566928"/>
           </a:xfrm>
           <a:prstGeom prst="rect">
             <a:avLst/>
@@ -28044,12 +28097,12 @@
           <a:noFill/>
         </p:spPr>
         <p:txBody>
-          <a:bodyPr wrap="square" lIns="0" tIns="0" rIns="0" bIns="0" anchor="t">
+          <a:bodyPr wrap="square" lIns="0" tIns="0" rIns="0" bIns="0" anchor="ctr">
             <a:spAutoFit/>
           </a:bodyPr>
           <a:lstStyle/>
           <a:p>
-            <a:pPr algn="l">
+            <a:pPr algn="ctr">
               <a:spcBef>
                 <a:spcPts val="0"/>
               </a:spcBef>
@@ -28058,33 +28111,117 @@
               </a:spcAft>
             </a:pPr>
             <a:r>
-              <a:rPr sz="1300" b="0" i="1">
-                <a:solidFill>
-                  <a:srgbClr val="64748B"/>
+              <a:rPr sz="1150" b="1" i="0">
+                <a:solidFill>
+                  <a:srgbClr val="FFFFFF"/>
                 </a:solidFill>
                 <a:latin typeface="Calibri"/>
               </a:rPr>
-              <a:t>Daily XAU/USD, 962 test windows, 3 seeds — honest walk-forward comparison</a:t>
-            </a:r>
-          </a:p>
-        </p:txBody>
-      </p:sp>
-      <p:sp>
-        <p:nvSpPr>
-          <p:cNvPr id="5" name="Rectangle 4"/>
+              <a:t>MAE ↓</a:t>
+            </a:r>
+          </a:p>
+        </p:txBody>
+      </p:sp>
+      <p:sp>
+        <p:nvSpPr>
+          <p:cNvPr id="8" name="TextBox 7"/>
+          <p:cNvSpPr txBox="1"/>
+          <p:nvPr/>
+        </p:nvSpPr>
+        <p:spPr>
+          <a:xfrm>
+            <a:off x="4453128" y="1645920"/>
+            <a:ext cx="1554480" cy="566928"/>
+          </a:xfrm>
+          <a:prstGeom prst="rect">
+            <a:avLst/>
+          </a:prstGeom>
+          <a:noFill/>
+        </p:spPr>
+        <p:txBody>
+          <a:bodyPr wrap="square" lIns="0" tIns="0" rIns="0" bIns="0" anchor="ctr">
+            <a:spAutoFit/>
+          </a:bodyPr>
+          <a:lstStyle/>
+          <a:p>
+            <a:pPr algn="ctr">
+              <a:spcBef>
+                <a:spcPts val="0"/>
+              </a:spcBef>
+              <a:spcAft>
+                <a:spcPts val="200"/>
+              </a:spcAft>
+            </a:pPr>
+            <a:r>
+              <a:rPr sz="1150" b="1" i="0">
+                <a:solidFill>
+                  <a:srgbClr val="FFFFFF"/>
+                </a:solidFill>
+                <a:latin typeface="Calibri"/>
+              </a:rPr>
+              <a:t>Directional Acc. ↑</a:t>
+            </a:r>
+          </a:p>
+        </p:txBody>
+      </p:sp>
+      <p:sp>
+        <p:nvSpPr>
+          <p:cNvPr id="9" name="TextBox 8"/>
+          <p:cNvSpPr txBox="1"/>
+          <p:nvPr/>
+        </p:nvSpPr>
+        <p:spPr>
+          <a:xfrm>
+            <a:off x="6190488" y="1846947"/>
+            <a:ext cx="872163" cy="176972"/>
+          </a:xfrm>
+          <a:prstGeom prst="rect">
+            <a:avLst/>
+          </a:prstGeom>
+          <a:noFill/>
+        </p:spPr>
+        <p:txBody>
+          <a:bodyPr wrap="square" lIns="0" tIns="0" rIns="0" bIns="0" anchor="ctr">
+            <a:spAutoFit/>
+          </a:bodyPr>
+          <a:lstStyle/>
+          <a:p>
+            <a:pPr algn="l">
+              <a:spcBef>
+                <a:spcPts val="0"/>
+              </a:spcBef>
+              <a:spcAft>
+                <a:spcPts val="200"/>
+              </a:spcAft>
+            </a:pPr>
+            <a:r>
+              <a:rPr sz="1150" b="1" i="0" dirty="0">
+                <a:solidFill>
+                  <a:srgbClr val="FFFFFF"/>
+                </a:solidFill>
+                <a:latin typeface="Calibri"/>
+              </a:rPr>
+              <a:t>Role</a:t>
+            </a:r>
+          </a:p>
+        </p:txBody>
+      </p:sp>
+      <p:sp>
+        <p:nvSpPr>
+          <p:cNvPr id="10" name="Rectangle 9"/>
           <p:cNvSpPr/>
           <p:nvPr/>
         </p:nvSpPr>
         <p:spPr>
           <a:xfrm>
-            <a:off x="566928" y="1645920"/>
-            <a:ext cx="6766560" cy="566928"/>
+            <a:off x="566927" y="2212848"/>
+            <a:ext cx="7227243" cy="566928"/>
           </a:xfrm>
           <a:prstGeom prst="rect">
             <a:avLst/>
           </a:prstGeom>
           <a:solidFill>
-            <a:srgbClr val="1E2738"/>
+            <a:srgbClr val="EEEEEE"/>
           </a:solidFill>
           <a:ln>
             <a:noFill/>
@@ -28116,13 +28253,13 @@
       </p:sp>
       <p:sp>
         <p:nvSpPr>
-          <p:cNvPr id="6" name="TextBox 5"/>
+          <p:cNvPr id="11" name="TextBox 10"/>
           <p:cNvSpPr txBox="1"/>
           <p:nvPr/>
         </p:nvSpPr>
         <p:spPr>
           <a:xfrm>
-            <a:off x="704088" y="1645920"/>
+            <a:off x="704088" y="2212848"/>
             <a:ext cx="2560320" cy="566928"/>
           </a:xfrm>
           <a:prstGeom prst="rect">
@@ -28147,24 +28284,24 @@
             <a:r>
               <a:rPr sz="1150" b="1" i="0">
                 <a:solidFill>
-                  <a:srgbClr val="FFFFFF"/>
+                  <a:srgbClr val="1F3759"/>
                 </a:solidFill>
                 <a:latin typeface="Calibri"/>
               </a:rPr>
-              <a:t>Model</a:t>
-            </a:r>
-          </a:p>
-        </p:txBody>
-      </p:sp>
-      <p:sp>
-        <p:nvSpPr>
-          <p:cNvPr id="7" name="TextBox 6"/>
+              <a:t>GARCH  (AR1-GARCH1,1)</a:t>
+            </a:r>
+          </a:p>
+        </p:txBody>
+      </p:sp>
+      <p:sp>
+        <p:nvSpPr>
+          <p:cNvPr id="12" name="TextBox 11"/>
           <p:cNvSpPr txBox="1"/>
           <p:nvPr/>
         </p:nvSpPr>
         <p:spPr>
           <a:xfrm>
-            <a:off x="3447288" y="1645920"/>
+            <a:off x="3447288" y="2212848"/>
             <a:ext cx="822960" cy="566928"/>
           </a:xfrm>
           <a:prstGeom prst="rect">
@@ -28187,26 +28324,26 @@
               </a:spcAft>
             </a:pPr>
             <a:r>
-              <a:rPr sz="1150" b="1" i="0">
-                <a:solidFill>
-                  <a:srgbClr val="FFFFFF"/>
+              <a:rPr sz="1150" b="0" i="0">
+                <a:solidFill>
+                  <a:srgbClr val="334155"/>
                 </a:solidFill>
                 <a:latin typeface="Calibri"/>
               </a:rPr>
-              <a:t>MAE ↓</a:t>
-            </a:r>
-          </a:p>
-        </p:txBody>
-      </p:sp>
-      <p:sp>
-        <p:nvSpPr>
-          <p:cNvPr id="8" name="TextBox 7"/>
+              <a:t>0.0196</a:t>
+            </a:r>
+          </a:p>
+        </p:txBody>
+      </p:sp>
+      <p:sp>
+        <p:nvSpPr>
+          <p:cNvPr id="13" name="TextBox 12"/>
           <p:cNvSpPr txBox="1"/>
           <p:nvPr/>
         </p:nvSpPr>
         <p:spPr>
           <a:xfrm>
-            <a:off x="4453128" y="1645920"/>
+            <a:off x="4453128" y="2212848"/>
             <a:ext cx="1554480" cy="566928"/>
           </a:xfrm>
           <a:prstGeom prst="rect">
@@ -28229,75 +28366,33 @@
               </a:spcAft>
             </a:pPr>
             <a:r>
-              <a:rPr sz="1150" b="1" i="0">
-                <a:solidFill>
-                  <a:srgbClr val="FFFFFF"/>
+              <a:rPr sz="1150" b="0" i="0">
+                <a:solidFill>
+                  <a:srgbClr val="334155"/>
                 </a:solidFill>
                 <a:latin typeface="Calibri"/>
               </a:rPr>
-              <a:t>Directional Acc. ↑</a:t>
-            </a:r>
-          </a:p>
-        </p:txBody>
-      </p:sp>
-      <p:sp>
-        <p:nvSpPr>
-          <p:cNvPr id="9" name="TextBox 8"/>
-          <p:cNvSpPr txBox="1"/>
+              <a:t>0.576</a:t>
+            </a:r>
+          </a:p>
+        </p:txBody>
+      </p:sp>
+      <p:sp>
+        <p:nvSpPr>
+          <p:cNvPr id="15" name="Rectangle 14"/>
+          <p:cNvSpPr/>
           <p:nvPr/>
         </p:nvSpPr>
         <p:spPr>
           <a:xfrm>
-            <a:off x="6190488" y="1645920"/>
-            <a:ext cx="1645920" cy="566928"/>
+            <a:off x="566927" y="2779776"/>
+            <a:ext cx="7227243" cy="566928"/>
           </a:xfrm>
           <a:prstGeom prst="rect">
             <a:avLst/>
           </a:prstGeom>
-          <a:noFill/>
-        </p:spPr>
-        <p:txBody>
-          <a:bodyPr wrap="square" lIns="0" tIns="0" rIns="0" bIns="0" anchor="ctr">
-            <a:spAutoFit/>
-          </a:bodyPr>
-          <a:lstStyle/>
-          <a:p>
-            <a:pPr algn="l">
-              <a:spcBef>
-                <a:spcPts val="0"/>
-              </a:spcBef>
-              <a:spcAft>
-                <a:spcPts val="200"/>
-              </a:spcAft>
-            </a:pPr>
-            <a:r>
-              <a:rPr sz="1150" b="1" i="0">
-                <a:solidFill>
-                  <a:srgbClr val="FFFFFF"/>
-                </a:solidFill>
-                <a:latin typeface="Calibri"/>
-              </a:rPr>
-              <a:t>Role</a:t>
-            </a:r>
-          </a:p>
-        </p:txBody>
-      </p:sp>
-      <p:sp>
-        <p:nvSpPr>
-          <p:cNvPr id="10" name="Rectangle 9"/>
-          <p:cNvSpPr/>
-          <p:nvPr/>
-        </p:nvSpPr>
-        <p:spPr>
-          <a:xfrm>
-            <a:off x="566928" y="2212848"/>
-            <a:ext cx="6766560" cy="566928"/>
-          </a:xfrm>
-          <a:prstGeom prst="rect">
-            <a:avLst/>
-          </a:prstGeom>
           <a:solidFill>
-            <a:srgbClr val="EEEEEE"/>
+            <a:srgbClr val="E4E4E4"/>
           </a:solidFill>
           <a:ln>
             <a:noFill/>
@@ -28329,13 +28424,13 @@
       </p:sp>
       <p:sp>
         <p:nvSpPr>
-          <p:cNvPr id="11" name="TextBox 10"/>
+          <p:cNvPr id="16" name="TextBox 15"/>
           <p:cNvSpPr txBox="1"/>
           <p:nvPr/>
         </p:nvSpPr>
         <p:spPr>
           <a:xfrm>
-            <a:off x="704088" y="2212848"/>
+            <a:off x="704088" y="2779776"/>
             <a:ext cx="2560320" cy="566928"/>
           </a:xfrm>
           <a:prstGeom prst="rect">
@@ -28364,20 +28459,20 @@
                 </a:solidFill>
                 <a:latin typeface="Calibri"/>
               </a:rPr>
-              <a:t>GARCH  (AR1-GARCH1,1)</a:t>
-            </a:r>
-          </a:p>
-        </p:txBody>
-      </p:sp>
-      <p:sp>
-        <p:nvSpPr>
-          <p:cNvPr id="12" name="TextBox 11"/>
+              <a:t>ARIMA  (walk-forward)</a:t>
+            </a:r>
+          </a:p>
+        </p:txBody>
+      </p:sp>
+      <p:sp>
+        <p:nvSpPr>
+          <p:cNvPr id="17" name="TextBox 16"/>
           <p:cNvSpPr txBox="1"/>
           <p:nvPr/>
         </p:nvSpPr>
         <p:spPr>
           <a:xfrm>
-            <a:off x="3447288" y="2212848"/>
+            <a:off x="3447288" y="2779776"/>
             <a:ext cx="822960" cy="566928"/>
           </a:xfrm>
           <a:prstGeom prst="rect">
@@ -28406,20 +28501,20 @@
                 </a:solidFill>
                 <a:latin typeface="Calibri"/>
               </a:rPr>
-              <a:t>0.0196</a:t>
-            </a:r>
-          </a:p>
-        </p:txBody>
-      </p:sp>
-      <p:sp>
-        <p:nvSpPr>
-          <p:cNvPr id="13" name="TextBox 12"/>
+              <a:t>0.0199</a:t>
+            </a:r>
+          </a:p>
+        </p:txBody>
+      </p:sp>
+      <p:sp>
+        <p:nvSpPr>
+          <p:cNvPr id="18" name="TextBox 17"/>
           <p:cNvSpPr txBox="1"/>
           <p:nvPr/>
         </p:nvSpPr>
         <p:spPr>
           <a:xfrm>
-            <a:off x="4453128" y="2212848"/>
+            <a:off x="4453128" y="2779776"/>
             <a:ext cx="1554480" cy="566928"/>
           </a:xfrm>
           <a:prstGeom prst="rect">
@@ -28448,69 +28543,27 @@
                 </a:solidFill>
                 <a:latin typeface="Calibri"/>
               </a:rPr>
-              <a:t>0.576</a:t>
-            </a:r>
-          </a:p>
-        </p:txBody>
-      </p:sp>
-      <p:sp>
-        <p:nvSpPr>
-          <p:cNvPr id="14" name="TextBox 13"/>
-          <p:cNvSpPr txBox="1"/>
+              <a:t>0.485</a:t>
+            </a:r>
+          </a:p>
+        </p:txBody>
+      </p:sp>
+      <p:sp>
+        <p:nvSpPr>
+          <p:cNvPr id="20" name="Rectangle 19"/>
+          <p:cNvSpPr/>
           <p:nvPr/>
         </p:nvSpPr>
         <p:spPr>
           <a:xfrm>
-            <a:off x="6190488" y="2212848"/>
-            <a:ext cx="1645920" cy="566928"/>
+            <a:off x="566927" y="3346704"/>
+            <a:ext cx="7227243" cy="566928"/>
           </a:xfrm>
           <a:prstGeom prst="rect">
             <a:avLst/>
           </a:prstGeom>
-          <a:noFill/>
-        </p:spPr>
-        <p:txBody>
-          <a:bodyPr wrap="square" lIns="0" tIns="0" rIns="0" bIns="0" anchor="ctr">
-            <a:spAutoFit/>
-          </a:bodyPr>
-          <a:lstStyle/>
-          <a:p>
-            <a:pPr algn="l">
-              <a:spcBef>
-                <a:spcPts val="0"/>
-              </a:spcBef>
-              <a:spcAft>
-                <a:spcPts val="200"/>
-              </a:spcAft>
-            </a:pPr>
-            <a:r>
-              <a:rPr sz="1150" b="0" i="0">
-                <a:solidFill>
-                  <a:srgbClr val="334155"/>
-                </a:solidFill>
-                <a:latin typeface="Calibri"/>
-              </a:rPr>
-              <a:t>Econometric baseline</a:t>
-            </a:r>
-          </a:p>
-        </p:txBody>
-      </p:sp>
-      <p:sp>
-        <p:nvSpPr>
-          <p:cNvPr id="15" name="Rectangle 14"/>
-          <p:cNvSpPr/>
-          <p:nvPr/>
-        </p:nvSpPr>
-        <p:spPr>
-          <a:xfrm>
-            <a:off x="566928" y="2779776"/>
-            <a:ext cx="6766560" cy="566928"/>
-          </a:xfrm>
-          <a:prstGeom prst="rect">
-            <a:avLst/>
-          </a:prstGeom>
           <a:solidFill>
-            <a:srgbClr val="E4E4E4"/>
+            <a:srgbClr val="EEEEEE"/>
           </a:solidFill>
           <a:ln>
             <a:noFill/>
@@ -28542,13 +28595,13 @@
       </p:sp>
       <p:sp>
         <p:nvSpPr>
-          <p:cNvPr id="16" name="TextBox 15"/>
+          <p:cNvPr id="21" name="TextBox 20"/>
           <p:cNvSpPr txBox="1"/>
           <p:nvPr/>
         </p:nvSpPr>
         <p:spPr>
           <a:xfrm>
-            <a:off x="704088" y="2779776"/>
+            <a:off x="704088" y="3346704"/>
             <a:ext cx="2560320" cy="566928"/>
           </a:xfrm>
           <a:prstGeom prst="rect">
@@ -28577,20 +28630,20 @@
                 </a:solidFill>
                 <a:latin typeface="Calibri"/>
               </a:rPr>
-              <a:t>ARIMA  (walk-forward)</a:t>
-            </a:r>
-          </a:p>
-        </p:txBody>
-      </p:sp>
-      <p:sp>
-        <p:nvSpPr>
-          <p:cNvPr id="17" name="TextBox 16"/>
+              <a:t>Hybrid CNN-LSTM-Transformer</a:t>
+            </a:r>
+          </a:p>
+        </p:txBody>
+      </p:sp>
+      <p:sp>
+        <p:nvSpPr>
+          <p:cNvPr id="22" name="TextBox 21"/>
           <p:cNvSpPr txBox="1"/>
           <p:nvPr/>
         </p:nvSpPr>
         <p:spPr>
           <a:xfrm>
-            <a:off x="3447288" y="2779776"/>
+            <a:off x="3447288" y="3346704"/>
             <a:ext cx="822960" cy="566928"/>
           </a:xfrm>
           <a:prstGeom prst="rect">
@@ -28619,20 +28672,20 @@
                 </a:solidFill>
                 <a:latin typeface="Calibri"/>
               </a:rPr>
-              <a:t>0.0199</a:t>
-            </a:r>
-          </a:p>
-        </p:txBody>
-      </p:sp>
-      <p:sp>
-        <p:nvSpPr>
-          <p:cNvPr id="18" name="TextBox 17"/>
+              <a:t>0.023</a:t>
+            </a:r>
+          </a:p>
+        </p:txBody>
+      </p:sp>
+      <p:sp>
+        <p:nvSpPr>
+          <p:cNvPr id="23" name="TextBox 22"/>
           <p:cNvSpPr txBox="1"/>
           <p:nvPr/>
         </p:nvSpPr>
         <p:spPr>
           <a:xfrm>
-            <a:off x="4453128" y="2779776"/>
+            <a:off x="4453128" y="3346704"/>
             <a:ext cx="1554480" cy="566928"/>
           </a:xfrm>
           <a:prstGeom prst="rect">
@@ -28655,27 +28708,27 @@
               </a:spcAft>
             </a:pPr>
             <a:r>
-              <a:rPr sz="1150" b="0" i="0">
+              <a:rPr sz="1150" b="0" i="0" dirty="0">
                 <a:solidFill>
                   <a:srgbClr val="334155"/>
                 </a:solidFill>
                 <a:latin typeface="Calibri"/>
               </a:rPr>
-              <a:t>0.485</a:t>
-            </a:r>
-          </a:p>
-        </p:txBody>
-      </p:sp>
-      <p:sp>
-        <p:nvSpPr>
-          <p:cNvPr id="19" name="TextBox 18"/>
+              <a:t>0.50</a:t>
+            </a:r>
+          </a:p>
+        </p:txBody>
+      </p:sp>
+      <p:sp>
+        <p:nvSpPr>
+          <p:cNvPr id="24" name="TextBox 23"/>
           <p:cNvSpPr txBox="1"/>
           <p:nvPr/>
         </p:nvSpPr>
         <p:spPr>
           <a:xfrm>
-            <a:off x="6190488" y="2779776"/>
-            <a:ext cx="1645920" cy="566928"/>
+            <a:off x="6184394" y="3474780"/>
+            <a:ext cx="1325880" cy="353943"/>
           </a:xfrm>
           <a:prstGeom prst="rect">
             <a:avLst/>
@@ -28697,33 +28750,95 @@
               </a:spcAft>
             </a:pPr>
             <a:r>
-              <a:rPr sz="1150" b="0" i="0">
+              <a:rPr sz="1150" b="0" i="0" dirty="0">
                 <a:solidFill>
                   <a:srgbClr val="334155"/>
                 </a:solidFill>
                 <a:latin typeface="Calibri"/>
               </a:rPr>
-              <a:t>Econometric baseline</a:t>
-            </a:r>
-          </a:p>
-        </p:txBody>
-      </p:sp>
-      <p:sp>
-        <p:nvSpPr>
-          <p:cNvPr id="20" name="Rectangle 19"/>
+              <a:t>Proposed multi-modal model</a:t>
+            </a:r>
+          </a:p>
+        </p:txBody>
+      </p:sp>
+      <p:sp>
+        <p:nvSpPr>
+          <p:cNvPr id="25" name="TextBox 24"/>
+          <p:cNvSpPr txBox="1"/>
+          <p:nvPr/>
+        </p:nvSpPr>
+        <p:spPr>
+          <a:xfrm>
+            <a:off x="566928" y="4160520"/>
+            <a:ext cx="6766560" cy="457200"/>
+          </a:xfrm>
+          <a:prstGeom prst="rect">
+            <a:avLst/>
+          </a:prstGeom>
+          <a:noFill/>
+        </p:spPr>
+        <p:txBody>
+          <a:bodyPr wrap="square" lIns="0" tIns="0" rIns="0" bIns="0" anchor="t">
+            <a:spAutoFit/>
+          </a:bodyPr>
+          <a:lstStyle/>
+          <a:p>
+            <a:pPr algn="l">
+              <a:spcBef>
+                <a:spcPts val="0"/>
+              </a:spcBef>
+              <a:spcAft>
+                <a:spcPts val="200"/>
+              </a:spcAft>
+            </a:pPr>
+            <a:r>
+              <a:rPr sz="1050" b="0" i="1" dirty="0">
+                <a:solidFill>
+                  <a:srgbClr val="64748B"/>
+                </a:solidFill>
+                <a:latin typeface="Calibri"/>
+              </a:rPr>
+              <a:t>Note: literature's 93–96% figures are single-step / leakage-prone; honest multi-step </a:t>
+            </a:r>
+            <a:r>
+              <a:rPr sz="1050" b="0" i="1" dirty="0" err="1">
+                <a:solidFill>
+                  <a:srgbClr val="64748B"/>
+                </a:solidFill>
+                <a:latin typeface="Calibri"/>
+              </a:rPr>
+              <a:t>DirAcc</a:t>
+            </a:r>
+            <a:r>
+              <a:rPr sz="1050" b="0" i="1" dirty="0">
+                <a:solidFill>
+                  <a:srgbClr val="64748B"/>
+                </a:solidFill>
+                <a:latin typeface="Calibri"/>
+              </a:rPr>
+              <a:t> sits at 0.50–0.58.</a:t>
+            </a:r>
+          </a:p>
+        </p:txBody>
+      </p:sp>
+      <p:sp>
+        <p:nvSpPr>
+          <p:cNvPr id="26" name="Rounded Rectangle 25"/>
           <p:cNvSpPr/>
           <p:nvPr/>
         </p:nvSpPr>
         <p:spPr>
           <a:xfrm>
-            <a:off x="566928" y="3346704"/>
-            <a:ext cx="6766560" cy="566928"/>
-          </a:xfrm>
-          <a:prstGeom prst="rect">
-            <a:avLst/>
+            <a:off x="8239880" y="1645920"/>
+            <a:ext cx="3249521" cy="1207008"/>
+          </a:xfrm>
+          <a:prstGeom prst="roundRect">
+            <a:avLst>
+              <a:gd name="adj" fmla="val 8000"/>
+            </a:avLst>
           </a:prstGeom>
           <a:solidFill>
-            <a:srgbClr val="EEEEEE"/>
+            <a:srgbClr val="1E2738"/>
           </a:solidFill>
           <a:ln>
             <a:noFill/>
@@ -28755,182 +28870,14 @@
       </p:sp>
       <p:sp>
         <p:nvSpPr>
-          <p:cNvPr id="21" name="TextBox 20"/>
+          <p:cNvPr id="27" name="TextBox 26"/>
           <p:cNvSpPr txBox="1"/>
           <p:nvPr/>
         </p:nvSpPr>
         <p:spPr>
           <a:xfrm>
-            <a:off x="704088" y="3346704"/>
-            <a:ext cx="2560320" cy="566928"/>
-          </a:xfrm>
-          <a:prstGeom prst="rect">
-            <a:avLst/>
-          </a:prstGeom>
-          <a:noFill/>
-        </p:spPr>
-        <p:txBody>
-          <a:bodyPr wrap="square" lIns="0" tIns="0" rIns="0" bIns="0" anchor="ctr">
-            <a:spAutoFit/>
-          </a:bodyPr>
-          <a:lstStyle/>
-          <a:p>
-            <a:pPr algn="l">
-              <a:spcBef>
-                <a:spcPts val="0"/>
-              </a:spcBef>
-              <a:spcAft>
-                <a:spcPts val="200"/>
-              </a:spcAft>
-            </a:pPr>
-            <a:r>
-              <a:rPr sz="1150" b="1" i="0">
-                <a:solidFill>
-                  <a:srgbClr val="1F3759"/>
-                </a:solidFill>
-                <a:latin typeface="Calibri"/>
-              </a:rPr>
-              <a:t>Hybrid CNN-LSTM-Transformer</a:t>
-            </a:r>
-          </a:p>
-        </p:txBody>
-      </p:sp>
-      <p:sp>
-        <p:nvSpPr>
-          <p:cNvPr id="22" name="TextBox 21"/>
-          <p:cNvSpPr txBox="1"/>
-          <p:nvPr/>
-        </p:nvSpPr>
-        <p:spPr>
-          <a:xfrm>
-            <a:off x="3447288" y="3346704"/>
-            <a:ext cx="822960" cy="566928"/>
-          </a:xfrm>
-          <a:prstGeom prst="rect">
-            <a:avLst/>
-          </a:prstGeom>
-          <a:noFill/>
-        </p:spPr>
-        <p:txBody>
-          <a:bodyPr wrap="square" lIns="0" tIns="0" rIns="0" bIns="0" anchor="ctr">
-            <a:spAutoFit/>
-          </a:bodyPr>
-          <a:lstStyle/>
-          <a:p>
-            <a:pPr algn="ctr">
-              <a:spcBef>
-                <a:spcPts val="0"/>
-              </a:spcBef>
-              <a:spcAft>
-                <a:spcPts val="200"/>
-              </a:spcAft>
-            </a:pPr>
-            <a:r>
-              <a:rPr sz="1150" b="0" i="0">
-                <a:solidFill>
-                  <a:srgbClr val="334155"/>
-                </a:solidFill>
-                <a:latin typeface="Calibri"/>
-              </a:rPr>
-              <a:t>0.023</a:t>
-            </a:r>
-          </a:p>
-        </p:txBody>
-      </p:sp>
-      <p:sp>
-        <p:nvSpPr>
-          <p:cNvPr id="23" name="TextBox 22"/>
-          <p:cNvSpPr txBox="1"/>
-          <p:nvPr/>
-        </p:nvSpPr>
-        <p:spPr>
-          <a:xfrm>
-            <a:off x="4453128" y="3346704"/>
-            <a:ext cx="1554480" cy="566928"/>
-          </a:xfrm>
-          <a:prstGeom prst="rect">
-            <a:avLst/>
-          </a:prstGeom>
-          <a:noFill/>
-        </p:spPr>
-        <p:txBody>
-          <a:bodyPr wrap="square" lIns="0" tIns="0" rIns="0" bIns="0" anchor="ctr">
-            <a:spAutoFit/>
-          </a:bodyPr>
-          <a:lstStyle/>
-          <a:p>
-            <a:pPr algn="ctr">
-              <a:spcBef>
-                <a:spcPts val="0"/>
-              </a:spcBef>
-              <a:spcAft>
-                <a:spcPts val="200"/>
-              </a:spcAft>
-            </a:pPr>
-            <a:r>
-              <a:rPr sz="1150" b="0" i="0">
-                <a:solidFill>
-                  <a:srgbClr val="334155"/>
-                </a:solidFill>
-                <a:latin typeface="Calibri"/>
-              </a:rPr>
-              <a:t>0.50</a:t>
-            </a:r>
-          </a:p>
-        </p:txBody>
-      </p:sp>
-      <p:sp>
-        <p:nvSpPr>
-          <p:cNvPr id="24" name="TextBox 23"/>
-          <p:cNvSpPr txBox="1"/>
-          <p:nvPr/>
-        </p:nvSpPr>
-        <p:spPr>
-          <a:xfrm>
-            <a:off x="6190488" y="3346704"/>
-            <a:ext cx="1645920" cy="566928"/>
-          </a:xfrm>
-          <a:prstGeom prst="rect">
-            <a:avLst/>
-          </a:prstGeom>
-          <a:noFill/>
-        </p:spPr>
-        <p:txBody>
-          <a:bodyPr wrap="square" lIns="0" tIns="0" rIns="0" bIns="0" anchor="ctr">
-            <a:spAutoFit/>
-          </a:bodyPr>
-          <a:lstStyle/>
-          <a:p>
-            <a:pPr algn="l">
-              <a:spcBef>
-                <a:spcPts val="0"/>
-              </a:spcBef>
-              <a:spcAft>
-                <a:spcPts val="200"/>
-              </a:spcAft>
-            </a:pPr>
-            <a:r>
-              <a:rPr sz="1150" b="0" i="0">
-                <a:solidFill>
-                  <a:srgbClr val="334155"/>
-                </a:solidFill>
-                <a:latin typeface="Calibri"/>
-              </a:rPr>
-              <a:t>Proposed multi-modal model</a:t>
-            </a:r>
-          </a:p>
-        </p:txBody>
-      </p:sp>
-      <p:sp>
-        <p:nvSpPr>
-          <p:cNvPr id="25" name="TextBox 24"/>
-          <p:cNvSpPr txBox="1"/>
-          <p:nvPr/>
-        </p:nvSpPr>
-        <p:spPr>
-          <a:xfrm>
-            <a:off x="566928" y="4160520"/>
-            <a:ext cx="6766560" cy="457200"/>
+            <a:off x="8445143" y="1810512"/>
+            <a:ext cx="3291840" cy="640080"/>
           </a:xfrm>
           <a:prstGeom prst="rect">
             <a:avLst/>
@@ -28952,27 +28899,69 @@
               </a:spcAft>
             </a:pPr>
             <a:r>
-              <a:rPr sz="1050" b="0" i="1">
-                <a:solidFill>
-                  <a:srgbClr val="64748B"/>
+              <a:rPr sz="3000" b="1" i="0" dirty="0">
+                <a:solidFill>
+                  <a:srgbClr val="059669"/>
                 </a:solidFill>
                 <a:latin typeface="Calibri"/>
               </a:rPr>
-              <a:t>Note: literature's 93–96% figures are single-step / leakage-prone; honest multi-step DirAcc sits at 0.50–0.58.</a:t>
-            </a:r>
-          </a:p>
-        </p:txBody>
-      </p:sp>
-      <p:sp>
-        <p:nvSpPr>
-          <p:cNvPr id="26" name="Rounded Rectangle 25"/>
+              <a:t>+35%</a:t>
+            </a:r>
+          </a:p>
+        </p:txBody>
+      </p:sp>
+      <p:sp>
+        <p:nvSpPr>
+          <p:cNvPr id="28" name="TextBox 27"/>
+          <p:cNvSpPr txBox="1"/>
+          <p:nvPr/>
+        </p:nvSpPr>
+        <p:spPr>
+          <a:xfrm>
+            <a:off x="8445143" y="2432304"/>
+            <a:ext cx="3383280" cy="365760"/>
+          </a:xfrm>
+          <a:prstGeom prst="rect">
+            <a:avLst/>
+          </a:prstGeom>
+          <a:noFill/>
+        </p:spPr>
+        <p:txBody>
+          <a:bodyPr wrap="square" lIns="0" tIns="0" rIns="0" bIns="0" anchor="t">
+            <a:spAutoFit/>
+          </a:bodyPr>
+          <a:lstStyle/>
+          <a:p>
+            <a:pPr algn="l">
+              <a:spcBef>
+                <a:spcPts val="0"/>
+              </a:spcBef>
+              <a:spcAft>
+                <a:spcPts val="200"/>
+              </a:spcAft>
+            </a:pPr>
+            <a:r>
+              <a:rPr sz="1100" b="0" i="0">
+                <a:solidFill>
+                  <a:srgbClr val="CBD5E1"/>
+                </a:solidFill>
+                <a:latin typeface="Calibri"/>
+              </a:rPr>
+              <a:t>costed conviction backtest (net, after 2bps fees)</a:t>
+            </a:r>
+          </a:p>
+        </p:txBody>
+      </p:sp>
+      <p:sp>
+        <p:nvSpPr>
+          <p:cNvPr id="29" name="Rounded Rectangle 28"/>
           <p:cNvSpPr/>
           <p:nvPr/>
         </p:nvSpPr>
         <p:spPr>
           <a:xfrm>
-            <a:off x="7680960" y="1645920"/>
-            <a:ext cx="3931920" cy="1207008"/>
+            <a:off x="8239880" y="3017520"/>
+            <a:ext cx="3249521" cy="1207008"/>
           </a:xfrm>
           <a:prstGeom prst="roundRect">
             <a:avLst>
@@ -29012,13 +29001,13 @@
       </p:sp>
       <p:sp>
         <p:nvSpPr>
-          <p:cNvPr id="27" name="TextBox 26"/>
+          <p:cNvPr id="30" name="TextBox 29"/>
           <p:cNvSpPr txBox="1"/>
           <p:nvPr/>
         </p:nvSpPr>
         <p:spPr>
           <a:xfrm>
-            <a:off x="8001000" y="1810512"/>
+            <a:off x="8445143" y="3182112"/>
             <a:ext cx="3291840" cy="640080"/>
           </a:xfrm>
           <a:prstGeom prst="rect">
@@ -29043,24 +29032,24 @@
             <a:r>
               <a:rPr sz="3000" b="1" i="0">
                 <a:solidFill>
-                  <a:srgbClr val="059669"/>
+                  <a:srgbClr val="0891B2"/>
                 </a:solidFill>
                 <a:latin typeface="Calibri"/>
               </a:rPr>
-              <a:t>+35%</a:t>
-            </a:r>
-          </a:p>
-        </p:txBody>
-      </p:sp>
-      <p:sp>
-        <p:nvSpPr>
-          <p:cNvPr id="28" name="TextBox 27"/>
+              <a:t>10-step</a:t>
+            </a:r>
+          </a:p>
+        </p:txBody>
+      </p:sp>
+      <p:sp>
+        <p:nvSpPr>
+          <p:cNvPr id="31" name="TextBox 30"/>
           <p:cNvSpPr txBox="1"/>
           <p:nvPr/>
         </p:nvSpPr>
         <p:spPr>
           <a:xfrm>
-            <a:off x="8001000" y="2432304"/>
+            <a:off x="8445143" y="3803904"/>
             <a:ext cx="3383280" cy="365760"/>
           </a:xfrm>
           <a:prstGeom prst="rect">
@@ -29089,21 +29078,21 @@
                 </a:solidFill>
                 <a:latin typeface="Calibri"/>
               </a:rPr>
-              <a:t>costed conviction backtest (net, after 2bps fees)</a:t>
-            </a:r>
-          </a:p>
-        </p:txBody>
-      </p:sp>
-      <p:sp>
-        <p:nvSpPr>
-          <p:cNvPr id="29" name="Rounded Rectangle 28"/>
+              <a:t>probabilistic forecast with a (μ, σ²) band per horizon</a:t>
+            </a:r>
+          </a:p>
+        </p:txBody>
+      </p:sp>
+      <p:sp>
+        <p:nvSpPr>
+          <p:cNvPr id="32" name="Rounded Rectangle 31"/>
           <p:cNvSpPr/>
           <p:nvPr/>
         </p:nvSpPr>
         <p:spPr>
           <a:xfrm>
-            <a:off x="7680960" y="3017520"/>
-            <a:ext cx="3931920" cy="1207008"/>
+            <a:off x="8239880" y="4389120"/>
+            <a:ext cx="3249521" cy="1207008"/>
           </a:xfrm>
           <a:prstGeom prst="roundRect">
             <a:avLst>
@@ -29143,14 +29132,14 @@
       </p:sp>
       <p:sp>
         <p:nvSpPr>
-          <p:cNvPr id="30" name="TextBox 29"/>
+          <p:cNvPr id="33" name="TextBox 32"/>
           <p:cNvSpPr txBox="1"/>
           <p:nvPr/>
         </p:nvSpPr>
         <p:spPr>
           <a:xfrm>
-            <a:off x="8001000" y="3182112"/>
-            <a:ext cx="3291840" cy="640080"/>
+            <a:off x="8445143" y="4553712"/>
+            <a:ext cx="3291840" cy="461665"/>
           </a:xfrm>
           <a:prstGeom prst="rect">
             <a:avLst/>
@@ -29172,26 +29161,26 @@
               </a:spcAft>
             </a:pPr>
             <a:r>
-              <a:rPr sz="3000" b="1" i="0">
-                <a:solidFill>
-                  <a:srgbClr val="0891B2"/>
+              <a:rPr sz="3000" b="1" i="0" dirty="0">
+                <a:solidFill>
+                  <a:srgbClr val="0070C0"/>
                 </a:solidFill>
                 <a:latin typeface="Calibri"/>
               </a:rPr>
-              <a:t>10-step</a:t>
-            </a:r>
-          </a:p>
-        </p:txBody>
-      </p:sp>
-      <p:sp>
-        <p:nvSpPr>
-          <p:cNvPr id="31" name="TextBox 30"/>
+              <a:t>30 feat.</a:t>
+            </a:r>
+          </a:p>
+        </p:txBody>
+      </p:sp>
+      <p:sp>
+        <p:nvSpPr>
+          <p:cNvPr id="34" name="TextBox 33"/>
           <p:cNvSpPr txBox="1"/>
           <p:nvPr/>
         </p:nvSpPr>
         <p:spPr>
           <a:xfrm>
-            <a:off x="8001000" y="3803904"/>
+            <a:off x="8445143" y="5175504"/>
             <a:ext cx="3383280" cy="365760"/>
           </a:xfrm>
           <a:prstGeom prst="rect">
@@ -29220,68 +29209,21 @@
                 </a:solidFill>
                 <a:latin typeface="Calibri"/>
               </a:rPr>
-              <a:t>probabilistic forecast with a (μ, σ²) band per horizon</a:t>
-            </a:r>
-          </a:p>
-        </p:txBody>
-      </p:sp>
-      <p:sp>
-        <p:nvSpPr>
-          <p:cNvPr id="32" name="Rounded Rectangle 31"/>
-          <p:cNvSpPr/>
-          <p:nvPr/>
-        </p:nvSpPr>
-        <p:spPr>
-          <a:xfrm>
-            <a:off x="7680960" y="4389120"/>
-            <a:ext cx="3931920" cy="1207008"/>
-          </a:xfrm>
-          <a:prstGeom prst="roundRect">
-            <a:avLst>
-              <a:gd name="adj" fmla="val 8000"/>
-            </a:avLst>
-          </a:prstGeom>
-          <a:solidFill>
-            <a:srgbClr val="1E2738"/>
-          </a:solidFill>
-          <a:ln>
-            <a:noFill/>
-          </a:ln>
-          <a:effectLst/>
-        </p:spPr>
-        <p:style>
-          <a:lnRef idx="1">
-            <a:schemeClr val="accent1"/>
-          </a:lnRef>
-          <a:fillRef idx="3">
-            <a:schemeClr val="accent1"/>
-          </a:fillRef>
-          <a:effectRef idx="2">
-            <a:schemeClr val="accent1"/>
-          </a:effectRef>
-          <a:fontRef idx="minor">
-            <a:schemeClr val="lt1"/>
-          </a:fontRef>
-        </p:style>
-        <p:txBody>
-          <a:bodyPr rtlCol="0" anchor="ctr"/>
-          <a:lstStyle/>
-          <a:p>
-            <a:pPr algn="ctr"/>
-            <a:endParaRPr/>
-          </a:p>
-        </p:txBody>
-      </p:sp>
-      <p:sp>
-        <p:nvSpPr>
-          <p:cNvPr id="33" name="TextBox 32"/>
+              <a:t>price + macro + FinBERT sentiment, multi-modal</a:t>
+            </a:r>
+          </a:p>
+        </p:txBody>
+      </p:sp>
+      <p:sp>
+        <p:nvSpPr>
+          <p:cNvPr id="35" name="TextBox 34"/>
           <p:cNvSpPr txBox="1"/>
           <p:nvPr/>
         </p:nvSpPr>
         <p:spPr>
           <a:xfrm>
-            <a:off x="8001000" y="4553712"/>
-            <a:ext cx="3291840" cy="640080"/>
+            <a:off x="566928" y="4714235"/>
+            <a:ext cx="6766560" cy="1097280"/>
           </a:xfrm>
           <a:prstGeom prst="rect">
             <a:avLst/>
@@ -29303,27 +29245,368 @@
               </a:spcAft>
             </a:pPr>
             <a:r>
-              <a:rPr sz="3000" b="1" i="0">
-                <a:solidFill>
-                  <a:srgbClr val="2563EB"/>
+              <a:rPr sz="1200" b="1" i="0" dirty="0">
+                <a:solidFill>
+                  <a:srgbClr val="1F3759"/>
                 </a:solidFill>
                 <a:latin typeface="Calibri"/>
               </a:rPr>
-              <a:t>30 feat.</a:t>
-            </a:r>
-          </a:p>
-        </p:txBody>
-      </p:sp>
-      <p:sp>
-        <p:nvSpPr>
-          <p:cNvPr id="34" name="TextBox 33"/>
+              <a:t>Discussion:  </a:t>
+            </a:r>
+            <a:r>
+              <a:rPr sz="1150" b="0" i="0" dirty="0">
+                <a:solidFill>
+                  <a:srgbClr val="334155"/>
+                </a:solidFill>
+                <a:latin typeface="Calibri"/>
+              </a:rPr>
+              <a:t>GARCH's AR(1) momentum drift is a strong directional baseline on trending gold.</a:t>
+            </a:r>
+          </a:p>
+          <a:p>
+            <a:pPr algn="l">
+              <a:spcBef>
+                <a:spcPts val="400"/>
+              </a:spcBef>
+              <a:spcAft>
+                <a:spcPts val="200"/>
+              </a:spcAft>
+            </a:pPr>
+            <a:r>
+              <a:rPr sz="1150" b="0" i="0" dirty="0">
+                <a:solidFill>
+                  <a:srgbClr val="334155"/>
+                </a:solidFill>
+                <a:latin typeface="Calibri"/>
+              </a:rPr>
+              <a:t>The Hybrid's genuine edge is its conviction machinery — a positive costed </a:t>
+            </a:r>
+            <a:r>
+              <a:rPr sz="1150" b="0" i="0" dirty="0" err="1">
+                <a:solidFill>
+                  <a:srgbClr val="334155"/>
+                </a:solidFill>
+                <a:latin typeface="Calibri"/>
+              </a:rPr>
+              <a:t>backtest</a:t>
+            </a:r>
+            <a:r>
+              <a:rPr sz="1150" b="0" i="0" dirty="0">
+                <a:solidFill>
+                  <a:srgbClr val="334155"/>
+                </a:solidFill>
+                <a:latin typeface="Calibri"/>
+              </a:rPr>
+              <a:t> and a regime-aware volatility band — plus multi-modal interpretability, rather than unfiltered directional accuracy.</a:t>
+            </a:r>
+          </a:p>
+        </p:txBody>
+      </p:sp>
+      <p:sp>
+        <p:nvSpPr>
+          <p:cNvPr id="36" name="Title 1">
+            <a:extLst>
+              <a:ext uri="{FF2B5EF4-FFF2-40B4-BE49-F238E27FC236}">
+                <a16:creationId xmlns:a16="http://schemas.microsoft.com/office/drawing/2014/main" id="{C4D4A70F-0757-29A1-ADB5-7FADEF3BB078}"/>
+              </a:ext>
+            </a:extLst>
+          </p:cNvPr>
+          <p:cNvSpPr txBox="1">
+            <a:spLocks/>
+          </p:cNvSpPr>
+          <p:nvPr/>
+        </p:nvSpPr>
+        <p:spPr>
+          <a:xfrm>
+            <a:off x="433905" y="330387"/>
+            <a:ext cx="6228806" cy="640940"/>
+          </a:xfrm>
+          <a:prstGeom prst="rect">
+            <a:avLst/>
+          </a:prstGeom>
+          <a:noFill/>
+          <a:ln>
+            <a:noFill/>
+          </a:ln>
+        </p:spPr>
+        <p:txBody>
+          <a:bodyPr spcFirstLastPara="1" wrap="square" lIns="91425" tIns="45700" rIns="91425" bIns="45700" anchor="ctr" anchorCtr="0">
+            <a:normAutofit/>
+          </a:bodyPr>
+          <a:lstStyle>
+            <a:defPPr marR="0" lvl="0" algn="l" rtl="0">
+              <a:lnSpc>
+                <a:spcPct val="100000"/>
+              </a:lnSpc>
+              <a:spcBef>
+                <a:spcPts val="0"/>
+              </a:spcBef>
+              <a:spcAft>
+                <a:spcPts val="0"/>
+              </a:spcAft>
+            </a:defPPr>
+            <a:lvl1pPr marR="0" lvl="0" algn="ctr" rtl="0">
+              <a:lnSpc>
+                <a:spcPct val="100000"/>
+              </a:lnSpc>
+              <a:spcBef>
+                <a:spcPts val="0"/>
+              </a:spcBef>
+              <a:spcAft>
+                <a:spcPts val="0"/>
+              </a:spcAft>
+              <a:buClr>
+                <a:schemeClr val="dk1"/>
+              </a:buClr>
+              <a:buSzPts val="1800"/>
+              <a:buFont typeface="Calibri"/>
+              <a:buNone/>
+              <a:defRPr sz="4400" b="0" i="0" u="none" strike="noStrike" cap="none">
+                <a:solidFill>
+                  <a:schemeClr val="dk1"/>
+                </a:solidFill>
+                <a:latin typeface="Calibri"/>
+                <a:ea typeface="Calibri"/>
+                <a:cs typeface="Calibri"/>
+                <a:sym typeface="Calibri"/>
+              </a:defRPr>
+            </a:lvl1pPr>
+            <a:lvl2pPr marR="0" lvl="1" algn="l" rtl="0">
+              <a:lnSpc>
+                <a:spcPct val="100000"/>
+              </a:lnSpc>
+              <a:spcBef>
+                <a:spcPts val="0"/>
+              </a:spcBef>
+              <a:spcAft>
+                <a:spcPts val="0"/>
+              </a:spcAft>
+              <a:buClr>
+                <a:srgbClr val="000000"/>
+              </a:buClr>
+              <a:buSzPts val="1400"/>
+              <a:buFont typeface="Arial"/>
+              <a:buNone/>
+              <a:defRPr sz="1800" b="0" i="0" u="none" strike="noStrike" cap="none">
+                <a:solidFill>
+                  <a:srgbClr val="000000"/>
+                </a:solidFill>
+                <a:latin typeface="Arial"/>
+                <a:ea typeface="Arial"/>
+                <a:cs typeface="Arial"/>
+                <a:sym typeface="Arial"/>
+              </a:defRPr>
+            </a:lvl2pPr>
+            <a:lvl3pPr marR="0" lvl="2" algn="l" rtl="0">
+              <a:lnSpc>
+                <a:spcPct val="100000"/>
+              </a:lnSpc>
+              <a:spcBef>
+                <a:spcPts val="0"/>
+              </a:spcBef>
+              <a:spcAft>
+                <a:spcPts val="0"/>
+              </a:spcAft>
+              <a:buClr>
+                <a:srgbClr val="000000"/>
+              </a:buClr>
+              <a:buSzPts val="1400"/>
+              <a:buFont typeface="Arial"/>
+              <a:buNone/>
+              <a:defRPr sz="1800" b="0" i="0" u="none" strike="noStrike" cap="none">
+                <a:solidFill>
+                  <a:srgbClr val="000000"/>
+                </a:solidFill>
+                <a:latin typeface="Arial"/>
+                <a:ea typeface="Arial"/>
+                <a:cs typeface="Arial"/>
+                <a:sym typeface="Arial"/>
+              </a:defRPr>
+            </a:lvl3pPr>
+            <a:lvl4pPr marR="0" lvl="3" algn="l" rtl="0">
+              <a:lnSpc>
+                <a:spcPct val="100000"/>
+              </a:lnSpc>
+              <a:spcBef>
+                <a:spcPts val="0"/>
+              </a:spcBef>
+              <a:spcAft>
+                <a:spcPts val="0"/>
+              </a:spcAft>
+              <a:buClr>
+                <a:srgbClr val="000000"/>
+              </a:buClr>
+              <a:buSzPts val="1400"/>
+              <a:buFont typeface="Arial"/>
+              <a:buNone/>
+              <a:defRPr sz="1800" b="0" i="0" u="none" strike="noStrike" cap="none">
+                <a:solidFill>
+                  <a:srgbClr val="000000"/>
+                </a:solidFill>
+                <a:latin typeface="Arial"/>
+                <a:ea typeface="Arial"/>
+                <a:cs typeface="Arial"/>
+                <a:sym typeface="Arial"/>
+              </a:defRPr>
+            </a:lvl4pPr>
+            <a:lvl5pPr marR="0" lvl="4" algn="l" rtl="0">
+              <a:lnSpc>
+                <a:spcPct val="100000"/>
+              </a:lnSpc>
+              <a:spcBef>
+                <a:spcPts val="0"/>
+              </a:spcBef>
+              <a:spcAft>
+                <a:spcPts val="0"/>
+              </a:spcAft>
+              <a:buClr>
+                <a:srgbClr val="000000"/>
+              </a:buClr>
+              <a:buSzPts val="1400"/>
+              <a:buFont typeface="Arial"/>
+              <a:buNone/>
+              <a:defRPr sz="1800" b="0" i="0" u="none" strike="noStrike" cap="none">
+                <a:solidFill>
+                  <a:srgbClr val="000000"/>
+                </a:solidFill>
+                <a:latin typeface="Arial"/>
+                <a:ea typeface="Arial"/>
+                <a:cs typeface="Arial"/>
+                <a:sym typeface="Arial"/>
+              </a:defRPr>
+            </a:lvl5pPr>
+            <a:lvl6pPr marR="0" lvl="5" algn="l" rtl="0">
+              <a:lnSpc>
+                <a:spcPct val="100000"/>
+              </a:lnSpc>
+              <a:spcBef>
+                <a:spcPts val="0"/>
+              </a:spcBef>
+              <a:spcAft>
+                <a:spcPts val="0"/>
+              </a:spcAft>
+              <a:buClr>
+                <a:srgbClr val="000000"/>
+              </a:buClr>
+              <a:buSzPts val="1400"/>
+              <a:buFont typeface="Arial"/>
+              <a:buNone/>
+              <a:defRPr sz="1800" b="0" i="0" u="none" strike="noStrike" cap="none">
+                <a:solidFill>
+                  <a:srgbClr val="000000"/>
+                </a:solidFill>
+                <a:latin typeface="Arial"/>
+                <a:ea typeface="Arial"/>
+                <a:cs typeface="Arial"/>
+                <a:sym typeface="Arial"/>
+              </a:defRPr>
+            </a:lvl6pPr>
+            <a:lvl7pPr marR="0" lvl="6" algn="l" rtl="0">
+              <a:lnSpc>
+                <a:spcPct val="100000"/>
+              </a:lnSpc>
+              <a:spcBef>
+                <a:spcPts val="0"/>
+              </a:spcBef>
+              <a:spcAft>
+                <a:spcPts val="0"/>
+              </a:spcAft>
+              <a:buClr>
+                <a:srgbClr val="000000"/>
+              </a:buClr>
+              <a:buSzPts val="1400"/>
+              <a:buFont typeface="Arial"/>
+              <a:buNone/>
+              <a:defRPr sz="1800" b="0" i="0" u="none" strike="noStrike" cap="none">
+                <a:solidFill>
+                  <a:srgbClr val="000000"/>
+                </a:solidFill>
+                <a:latin typeface="Arial"/>
+                <a:ea typeface="Arial"/>
+                <a:cs typeface="Arial"/>
+                <a:sym typeface="Arial"/>
+              </a:defRPr>
+            </a:lvl7pPr>
+            <a:lvl8pPr marR="0" lvl="7" algn="l" rtl="0">
+              <a:lnSpc>
+                <a:spcPct val="100000"/>
+              </a:lnSpc>
+              <a:spcBef>
+                <a:spcPts val="0"/>
+              </a:spcBef>
+              <a:spcAft>
+                <a:spcPts val="0"/>
+              </a:spcAft>
+              <a:buClr>
+                <a:srgbClr val="000000"/>
+              </a:buClr>
+              <a:buSzPts val="1400"/>
+              <a:buFont typeface="Arial"/>
+              <a:buNone/>
+              <a:defRPr sz="1800" b="0" i="0" u="none" strike="noStrike" cap="none">
+                <a:solidFill>
+                  <a:srgbClr val="000000"/>
+                </a:solidFill>
+                <a:latin typeface="Arial"/>
+                <a:ea typeface="Arial"/>
+                <a:cs typeface="Arial"/>
+                <a:sym typeface="Arial"/>
+              </a:defRPr>
+            </a:lvl8pPr>
+            <a:lvl9pPr marR="0" lvl="8" algn="l" rtl="0">
+              <a:lnSpc>
+                <a:spcPct val="100000"/>
+              </a:lnSpc>
+              <a:spcBef>
+                <a:spcPts val="0"/>
+              </a:spcBef>
+              <a:spcAft>
+                <a:spcPts val="0"/>
+              </a:spcAft>
+              <a:buClr>
+                <a:srgbClr val="000000"/>
+              </a:buClr>
+              <a:buSzPts val="1400"/>
+              <a:buFont typeface="Arial"/>
+              <a:buNone/>
+              <a:defRPr sz="1800" b="0" i="0" u="none" strike="noStrike" cap="none">
+                <a:solidFill>
+                  <a:srgbClr val="000000"/>
+                </a:solidFill>
+                <a:latin typeface="Arial"/>
+                <a:ea typeface="Arial"/>
+                <a:cs typeface="Arial"/>
+                <a:sym typeface="Arial"/>
+              </a:defRPr>
+            </a:lvl9pPr>
+          </a:lstStyle>
+          <a:p>
+            <a:pPr algn="l"/>
+            <a:r>
+              <a:rPr lang="en-US" sz="3200" dirty="0">
+                <a:solidFill>
+                  <a:schemeClr val="bg2">
+                    <a:lumMod val="75000"/>
+                  </a:schemeClr>
+                </a:solidFill>
+                <a:latin typeface="Calibri" panose="020F0502020204030204" pitchFamily="34" charset="0"/>
+                <a:cs typeface="Calibri" panose="020F0502020204030204" pitchFamily="34" charset="0"/>
+              </a:rPr>
+              <a:t>Results, Discussion &amp; Benchmarks</a:t>
+            </a:r>
+          </a:p>
+        </p:txBody>
+      </p:sp>
+      <p:sp>
+        <p:nvSpPr>
+          <p:cNvPr id="19" name="TextBox 18"/>
           <p:cNvSpPr txBox="1"/>
           <p:nvPr/>
         </p:nvSpPr>
         <p:spPr>
           <a:xfrm>
-            <a:off x="8001000" y="5175504"/>
-            <a:ext cx="3383280" cy="365760"/>
+            <a:off x="6184394" y="2242941"/>
+            <a:ext cx="1645920" cy="566928"/>
           </a:xfrm>
           <a:prstGeom prst="rect">
             <a:avLst/>
@@ -29331,7 +29614,7 @@
           <a:noFill/>
         </p:spPr>
         <p:txBody>
-          <a:bodyPr wrap="square" lIns="0" tIns="0" rIns="0" bIns="0" anchor="t">
+          <a:bodyPr wrap="square" lIns="0" tIns="0" rIns="0" bIns="0" anchor="ctr">
             <a:spAutoFit/>
           </a:bodyPr>
           <a:lstStyle/>
@@ -29345,27 +29628,27 @@
               </a:spcAft>
             </a:pPr>
             <a:r>
-              <a:rPr sz="1100" b="0" i="0">
-                <a:solidFill>
-                  <a:srgbClr val="CBD5E1"/>
+              <a:rPr sz="1150" b="0" i="0" dirty="0">
+                <a:solidFill>
+                  <a:srgbClr val="334155"/>
                 </a:solidFill>
                 <a:latin typeface="Calibri"/>
               </a:rPr>
-              <a:t>price + macro + FinBERT sentiment, multi-modal</a:t>
-            </a:r>
-          </a:p>
-        </p:txBody>
-      </p:sp>
-      <p:sp>
-        <p:nvSpPr>
-          <p:cNvPr id="35" name="TextBox 34"/>
+              <a:t>Econometric baseline</a:t>
+            </a:r>
+          </a:p>
+        </p:txBody>
+      </p:sp>
+      <p:sp>
+        <p:nvSpPr>
+          <p:cNvPr id="14" name="TextBox 13"/>
           <p:cNvSpPr txBox="1"/>
           <p:nvPr/>
         </p:nvSpPr>
         <p:spPr>
           <a:xfrm>
-            <a:off x="566928" y="4800600"/>
-            <a:ext cx="6766560" cy="1097280"/>
+            <a:off x="6184394" y="2779776"/>
+            <a:ext cx="1645920" cy="566928"/>
           </a:xfrm>
           <a:prstGeom prst="rect">
             <a:avLst/>
@@ -29373,7 +29656,7 @@
           <a:noFill/>
         </p:spPr>
         <p:txBody>
-          <a:bodyPr wrap="square" lIns="0" tIns="0" rIns="0" bIns="0" anchor="t">
+          <a:bodyPr wrap="square" lIns="0" tIns="0" rIns="0" bIns="0" anchor="ctr">
             <a:spAutoFit/>
           </a:bodyPr>
           <a:lstStyle/>
@@ -29387,41 +29670,13 @@
               </a:spcAft>
             </a:pPr>
             <a:r>
-              <a:rPr sz="1200" b="1" i="0">
-                <a:solidFill>
-                  <a:srgbClr val="1F3759"/>
+              <a:rPr sz="1150" b="0" i="0" dirty="0">
+                <a:solidFill>
+                  <a:srgbClr val="334155"/>
                 </a:solidFill>
                 <a:latin typeface="Calibri"/>
               </a:rPr>
-              <a:t>Discussion:  </a:t>
-            </a:r>
-            <a:r>
-              <a:rPr sz="1150" b="0" i="0">
-                <a:solidFill>
-                  <a:srgbClr val="334155"/>
-                </a:solidFill>
-                <a:latin typeface="Calibri"/>
-              </a:rPr>
-              <a:t>GARCH's AR(1) momentum drift is a strong directional baseline on trending gold.</a:t>
-            </a:r>
-          </a:p>
-          <a:p>
-            <a:pPr algn="l">
-              <a:spcBef>
-                <a:spcPts val="400"/>
-              </a:spcBef>
-              <a:spcAft>
-                <a:spcPts val="200"/>
-              </a:spcAft>
-            </a:pPr>
-            <a:r>
-              <a:rPr sz="1150" b="0" i="0">
-                <a:solidFill>
-                  <a:srgbClr val="334155"/>
-                </a:solidFill>
-                <a:latin typeface="Calibri"/>
-              </a:rPr>
-              <a:t>The Hybrid's genuine edge is its conviction machinery — a positive costed backtest and a regime-aware volatility band — plus multi-modal interpretability, rather than unfiltered directional accuracy.</a:t>
+              <a:t>Econometric baseline</a:t>
             </a:r>
           </a:p>
         </p:txBody>
@@ -29453,59 +29708,14 @@
       </p:grpSpPr>
       <p:sp>
         <p:nvSpPr>
-          <p:cNvPr id="2" name="Rectangle 1"/>
-          <p:cNvSpPr/>
-          <p:nvPr/>
-        </p:nvSpPr>
-        <p:spPr>
-          <a:xfrm>
-            <a:off x="566928" y="548640"/>
-            <a:ext cx="82296" cy="502920"/>
-          </a:xfrm>
-          <a:prstGeom prst="rect">
-            <a:avLst/>
-          </a:prstGeom>
-          <a:solidFill>
-            <a:srgbClr val="2DD4BF"/>
-          </a:solidFill>
-          <a:ln>
-            <a:noFill/>
-          </a:ln>
-          <a:effectLst/>
-        </p:spPr>
-        <p:style>
-          <a:lnRef idx="1">
-            <a:schemeClr val="accent1"/>
-          </a:lnRef>
-          <a:fillRef idx="3">
-            <a:schemeClr val="accent1"/>
-          </a:fillRef>
-          <a:effectRef idx="2">
-            <a:schemeClr val="accent1"/>
-          </a:effectRef>
-          <a:fontRef idx="minor">
-            <a:schemeClr val="lt1"/>
-          </a:fontRef>
-        </p:style>
-        <p:txBody>
-          <a:bodyPr rtlCol="0" anchor="ctr"/>
-          <a:lstStyle/>
-          <a:p>
-            <a:pPr algn="ctr"/>
-            <a:endParaRPr/>
-          </a:p>
-        </p:txBody>
-      </p:sp>
-      <p:sp>
-        <p:nvSpPr>
-          <p:cNvPr id="3" name="TextBox 2"/>
+          <p:cNvPr id="4" name="TextBox 3"/>
           <p:cNvSpPr txBox="1"/>
           <p:nvPr/>
         </p:nvSpPr>
         <p:spPr>
           <a:xfrm>
-            <a:off x="777240" y="475488"/>
-            <a:ext cx="10515600" cy="731520"/>
+            <a:off x="777240" y="1170432"/>
+            <a:ext cx="8358051" cy="215444"/>
           </a:xfrm>
           <a:prstGeom prst="rect">
             <a:avLst/>
@@ -29516,65 +29726,34 @@
           <a:bodyPr wrap="square" lIns="0" tIns="0" rIns="0" bIns="0" anchor="t">
             <a:spAutoFit/>
           </a:bodyPr>
-          <a:lstStyle/>
-          <a:p>
-            <a:pPr algn="l">
-              <a:spcBef>
-                <a:spcPts val="0"/>
-              </a:spcBef>
+          <a:lstStyle>
+            <a:defPPr marR="0" lvl="0" algn="l" rtl="0">
+              <a:lnSpc>
+                <a:spcPct val="100000"/>
+              </a:lnSpc>
+              <a:spcBef>
+                <a:spcPts val="0"/>
+              </a:spcBef>
+              <a:spcAft>
+                <a:spcPts val="0"/>
+              </a:spcAft>
+              <a:defRPr/>
+            </a:defPPr>
+            <a:lvl1pPr>
               <a:spcAft>
                 <a:spcPts val="200"/>
               </a:spcAft>
-            </a:pPr>
-            <a:r>
-              <a:rPr sz="3200" b="1" i="0">
-                <a:solidFill>
-                  <a:srgbClr val="1F3759"/>
+              <a:defRPr i="1">
+                <a:solidFill>
+                  <a:schemeClr val="bg2"/>
                 </a:solidFill>
                 <a:latin typeface="Calibri"/>
-              </a:rPr>
-              <a:t>Interpretation &amp; Current Limitations</a:t>
-            </a:r>
-          </a:p>
-        </p:txBody>
-      </p:sp>
-      <p:sp>
-        <p:nvSpPr>
-          <p:cNvPr id="4" name="TextBox 3"/>
-          <p:cNvSpPr txBox="1"/>
-          <p:nvPr/>
-        </p:nvSpPr>
-        <p:spPr>
-          <a:xfrm>
-            <a:off x="777240" y="1170432"/>
-            <a:ext cx="10607040" cy="365760"/>
-          </a:xfrm>
-          <a:prstGeom prst="rect">
-            <a:avLst/>
-          </a:prstGeom>
-          <a:noFill/>
-        </p:spPr>
-        <p:txBody>
-          <a:bodyPr wrap="square" lIns="0" tIns="0" rIns="0" bIns="0" anchor="t">
-            <a:spAutoFit/>
-          </a:bodyPr>
-          <a:lstStyle/>
-          <a:p>
-            <a:pPr algn="l">
-              <a:spcBef>
-                <a:spcPts val="0"/>
-              </a:spcBef>
-              <a:spcAft>
-                <a:spcPts val="200"/>
-              </a:spcAft>
-            </a:pPr>
-            <a:r>
-              <a:rPr sz="1300" b="0" i="1">
-                <a:solidFill>
-                  <a:srgbClr val="64748B"/>
-                </a:solidFill>
-                <a:latin typeface="Calibri"/>
-              </a:rPr>
+              </a:defRPr>
+            </a:lvl1pPr>
+          </a:lstStyle>
+          <a:p>
+            <a:r>
+              <a:rPr dirty="0"/>
               <a:t>What the results mean — and where the honest boundaries are</a:t>
             </a:r>
           </a:p>
@@ -29744,25 +29923,7 @@
                 </a:solidFill>
                 <a:latin typeface="Calibri"/>
               </a:rPr>
-              <a:t>• The Hybrid </a:t>
-            </a:r>
-            <a:r>
-              <a:rPr sz="1200" b="0" i="0" dirty="0" err="1">
-                <a:solidFill>
-                  <a:schemeClr val="bg2"/>
-                </a:solidFill>
-                <a:latin typeface="Calibri"/>
-              </a:rPr>
-              <a:t>stabilises</a:t>
-            </a:r>
-            <a:r>
-              <a:rPr sz="1200" b="0" i="0" dirty="0">
-                <a:solidFill>
-                  <a:schemeClr val="bg2"/>
-                </a:solidFill>
-                <a:latin typeface="Calibri"/>
-              </a:rPr>
-              <a:t> multi-step forecasts and adds value through conviction filtering &amp; regime awareness.</a:t>
+              <a:t>• The Hybrid stabilizes multi-step forecasts and adds value through conviction filtering &amp; regime awareness.</a:t>
             </a:r>
           </a:p>
           <a:p>
@@ -30022,6 +30183,301 @@
                 <a:latin typeface="Calibri"/>
               </a:rPr>
               <a:t>• Sentiment is not yet a strong standalone directional driver at this coverage.</a:t>
+            </a:r>
+          </a:p>
+        </p:txBody>
+      </p:sp>
+      <p:sp>
+        <p:nvSpPr>
+          <p:cNvPr id="11" name="Title 1">
+            <a:extLst>
+              <a:ext uri="{FF2B5EF4-FFF2-40B4-BE49-F238E27FC236}">
+                <a16:creationId xmlns:a16="http://schemas.microsoft.com/office/drawing/2014/main" id="{7D27AAB5-87BF-B725-F255-2CD3C6F6E136}"/>
+              </a:ext>
+            </a:extLst>
+          </p:cNvPr>
+          <p:cNvSpPr txBox="1">
+            <a:spLocks/>
+          </p:cNvSpPr>
+          <p:nvPr/>
+        </p:nvSpPr>
+        <p:spPr>
+          <a:xfrm>
+            <a:off x="566928" y="471045"/>
+            <a:ext cx="6228806" cy="640940"/>
+          </a:xfrm>
+          <a:prstGeom prst="rect">
+            <a:avLst/>
+          </a:prstGeom>
+          <a:noFill/>
+          <a:ln>
+            <a:noFill/>
+          </a:ln>
+        </p:spPr>
+        <p:txBody>
+          <a:bodyPr spcFirstLastPara="1" wrap="square" lIns="91425" tIns="45700" rIns="91425" bIns="45700" anchor="ctr" anchorCtr="0">
+            <a:normAutofit/>
+          </a:bodyPr>
+          <a:lstStyle>
+            <a:defPPr marR="0" lvl="0" algn="l" rtl="0">
+              <a:lnSpc>
+                <a:spcPct val="100000"/>
+              </a:lnSpc>
+              <a:spcBef>
+                <a:spcPts val="0"/>
+              </a:spcBef>
+              <a:spcAft>
+                <a:spcPts val="0"/>
+              </a:spcAft>
+            </a:defPPr>
+            <a:lvl1pPr marR="0" lvl="0" algn="ctr" rtl="0">
+              <a:lnSpc>
+                <a:spcPct val="100000"/>
+              </a:lnSpc>
+              <a:spcBef>
+                <a:spcPts val="0"/>
+              </a:spcBef>
+              <a:spcAft>
+                <a:spcPts val="0"/>
+              </a:spcAft>
+              <a:buClr>
+                <a:schemeClr val="dk1"/>
+              </a:buClr>
+              <a:buSzPts val="1800"/>
+              <a:buFont typeface="Calibri"/>
+              <a:buNone/>
+              <a:defRPr sz="4400" b="0" i="0" u="none" strike="noStrike" cap="none">
+                <a:solidFill>
+                  <a:schemeClr val="dk1"/>
+                </a:solidFill>
+                <a:latin typeface="Calibri"/>
+                <a:ea typeface="Calibri"/>
+                <a:cs typeface="Calibri"/>
+                <a:sym typeface="Calibri"/>
+              </a:defRPr>
+            </a:lvl1pPr>
+            <a:lvl2pPr marR="0" lvl="1" algn="l" rtl="0">
+              <a:lnSpc>
+                <a:spcPct val="100000"/>
+              </a:lnSpc>
+              <a:spcBef>
+                <a:spcPts val="0"/>
+              </a:spcBef>
+              <a:spcAft>
+                <a:spcPts val="0"/>
+              </a:spcAft>
+              <a:buClr>
+                <a:srgbClr val="000000"/>
+              </a:buClr>
+              <a:buSzPts val="1400"/>
+              <a:buFont typeface="Arial"/>
+              <a:buNone/>
+              <a:defRPr sz="1800" b="0" i="0" u="none" strike="noStrike" cap="none">
+                <a:solidFill>
+                  <a:srgbClr val="000000"/>
+                </a:solidFill>
+                <a:latin typeface="Arial"/>
+                <a:ea typeface="Arial"/>
+                <a:cs typeface="Arial"/>
+                <a:sym typeface="Arial"/>
+              </a:defRPr>
+            </a:lvl2pPr>
+            <a:lvl3pPr marR="0" lvl="2" algn="l" rtl="0">
+              <a:lnSpc>
+                <a:spcPct val="100000"/>
+              </a:lnSpc>
+              <a:spcBef>
+                <a:spcPts val="0"/>
+              </a:spcBef>
+              <a:spcAft>
+                <a:spcPts val="0"/>
+              </a:spcAft>
+              <a:buClr>
+                <a:srgbClr val="000000"/>
+              </a:buClr>
+              <a:buSzPts val="1400"/>
+              <a:buFont typeface="Arial"/>
+              <a:buNone/>
+              <a:defRPr sz="1800" b="0" i="0" u="none" strike="noStrike" cap="none">
+                <a:solidFill>
+                  <a:srgbClr val="000000"/>
+                </a:solidFill>
+                <a:latin typeface="Arial"/>
+                <a:ea typeface="Arial"/>
+                <a:cs typeface="Arial"/>
+                <a:sym typeface="Arial"/>
+              </a:defRPr>
+            </a:lvl3pPr>
+            <a:lvl4pPr marR="0" lvl="3" algn="l" rtl="0">
+              <a:lnSpc>
+                <a:spcPct val="100000"/>
+              </a:lnSpc>
+              <a:spcBef>
+                <a:spcPts val="0"/>
+              </a:spcBef>
+              <a:spcAft>
+                <a:spcPts val="0"/>
+              </a:spcAft>
+              <a:buClr>
+                <a:srgbClr val="000000"/>
+              </a:buClr>
+              <a:buSzPts val="1400"/>
+              <a:buFont typeface="Arial"/>
+              <a:buNone/>
+              <a:defRPr sz="1800" b="0" i="0" u="none" strike="noStrike" cap="none">
+                <a:solidFill>
+                  <a:srgbClr val="000000"/>
+                </a:solidFill>
+                <a:latin typeface="Arial"/>
+                <a:ea typeface="Arial"/>
+                <a:cs typeface="Arial"/>
+                <a:sym typeface="Arial"/>
+              </a:defRPr>
+            </a:lvl4pPr>
+            <a:lvl5pPr marR="0" lvl="4" algn="l" rtl="0">
+              <a:lnSpc>
+                <a:spcPct val="100000"/>
+              </a:lnSpc>
+              <a:spcBef>
+                <a:spcPts val="0"/>
+              </a:spcBef>
+              <a:spcAft>
+                <a:spcPts val="0"/>
+              </a:spcAft>
+              <a:buClr>
+                <a:srgbClr val="000000"/>
+              </a:buClr>
+              <a:buSzPts val="1400"/>
+              <a:buFont typeface="Arial"/>
+              <a:buNone/>
+              <a:defRPr sz="1800" b="0" i="0" u="none" strike="noStrike" cap="none">
+                <a:solidFill>
+                  <a:srgbClr val="000000"/>
+                </a:solidFill>
+                <a:latin typeface="Arial"/>
+                <a:ea typeface="Arial"/>
+                <a:cs typeface="Arial"/>
+                <a:sym typeface="Arial"/>
+              </a:defRPr>
+            </a:lvl5pPr>
+            <a:lvl6pPr marR="0" lvl="5" algn="l" rtl="0">
+              <a:lnSpc>
+                <a:spcPct val="100000"/>
+              </a:lnSpc>
+              <a:spcBef>
+                <a:spcPts val="0"/>
+              </a:spcBef>
+              <a:spcAft>
+                <a:spcPts val="0"/>
+              </a:spcAft>
+              <a:buClr>
+                <a:srgbClr val="000000"/>
+              </a:buClr>
+              <a:buSzPts val="1400"/>
+              <a:buFont typeface="Arial"/>
+              <a:buNone/>
+              <a:defRPr sz="1800" b="0" i="0" u="none" strike="noStrike" cap="none">
+                <a:solidFill>
+                  <a:srgbClr val="000000"/>
+                </a:solidFill>
+                <a:latin typeface="Arial"/>
+                <a:ea typeface="Arial"/>
+                <a:cs typeface="Arial"/>
+                <a:sym typeface="Arial"/>
+              </a:defRPr>
+            </a:lvl6pPr>
+            <a:lvl7pPr marR="0" lvl="6" algn="l" rtl="0">
+              <a:lnSpc>
+                <a:spcPct val="100000"/>
+              </a:lnSpc>
+              <a:spcBef>
+                <a:spcPts val="0"/>
+              </a:spcBef>
+              <a:spcAft>
+                <a:spcPts val="0"/>
+              </a:spcAft>
+              <a:buClr>
+                <a:srgbClr val="000000"/>
+              </a:buClr>
+              <a:buSzPts val="1400"/>
+              <a:buFont typeface="Arial"/>
+              <a:buNone/>
+              <a:defRPr sz="1800" b="0" i="0" u="none" strike="noStrike" cap="none">
+                <a:solidFill>
+                  <a:srgbClr val="000000"/>
+                </a:solidFill>
+                <a:latin typeface="Arial"/>
+                <a:ea typeface="Arial"/>
+                <a:cs typeface="Arial"/>
+                <a:sym typeface="Arial"/>
+              </a:defRPr>
+            </a:lvl7pPr>
+            <a:lvl8pPr marR="0" lvl="7" algn="l" rtl="0">
+              <a:lnSpc>
+                <a:spcPct val="100000"/>
+              </a:lnSpc>
+              <a:spcBef>
+                <a:spcPts val="0"/>
+              </a:spcBef>
+              <a:spcAft>
+                <a:spcPts val="0"/>
+              </a:spcAft>
+              <a:buClr>
+                <a:srgbClr val="000000"/>
+              </a:buClr>
+              <a:buSzPts val="1400"/>
+              <a:buFont typeface="Arial"/>
+              <a:buNone/>
+              <a:defRPr sz="1800" b="0" i="0" u="none" strike="noStrike" cap="none">
+                <a:solidFill>
+                  <a:srgbClr val="000000"/>
+                </a:solidFill>
+                <a:latin typeface="Arial"/>
+                <a:ea typeface="Arial"/>
+                <a:cs typeface="Arial"/>
+                <a:sym typeface="Arial"/>
+              </a:defRPr>
+            </a:lvl8pPr>
+            <a:lvl9pPr marR="0" lvl="8" algn="l" rtl="0">
+              <a:lnSpc>
+                <a:spcPct val="100000"/>
+              </a:lnSpc>
+              <a:spcBef>
+                <a:spcPts val="0"/>
+              </a:spcBef>
+              <a:spcAft>
+                <a:spcPts val="0"/>
+              </a:spcAft>
+              <a:buClr>
+                <a:srgbClr val="000000"/>
+              </a:buClr>
+              <a:buSzPts val="1400"/>
+              <a:buFont typeface="Arial"/>
+              <a:buNone/>
+              <a:defRPr sz="1800" b="0" i="0" u="none" strike="noStrike" cap="none">
+                <a:solidFill>
+                  <a:srgbClr val="000000"/>
+                </a:solidFill>
+                <a:latin typeface="Arial"/>
+                <a:ea typeface="Arial"/>
+                <a:cs typeface="Arial"/>
+                <a:sym typeface="Arial"/>
+              </a:defRPr>
+            </a:lvl9pPr>
+          </a:lstStyle>
+          <a:p>
+            <a:pPr algn="l"/>
+            <a:r>
+              <a:rPr lang="en-US" sz="3200" dirty="0">
+                <a:solidFill>
+                  <a:schemeClr val="bg2">
+                    <a:lumMod val="75000"/>
+                  </a:schemeClr>
+                </a:solidFill>
+                <a:latin typeface="Calibri" panose="020F0502020204030204" pitchFamily="34" charset="0"/>
+                <a:cs typeface="Calibri" panose="020F0502020204030204" pitchFamily="34" charset="0"/>
+              </a:rPr>
+              <a:t>Interpretation &amp; Current Limitations</a:t>
             </a:r>
           </a:p>
         </p:txBody>
@@ -30678,20 +31134,25 @@
       </p:grpSpPr>
       <p:sp>
         <p:nvSpPr>
-          <p:cNvPr id="2" name="Rectangle 1"/>
+          <p:cNvPr id="4" name="Rounded Rectangle 3"/>
           <p:cNvSpPr/>
           <p:nvPr/>
         </p:nvSpPr>
         <p:spPr>
           <a:xfrm>
-            <a:off x="566928" y="548640"/>
-            <a:ext cx="82296" cy="502920"/>
-          </a:xfrm>
-          <a:prstGeom prst="rect">
-            <a:avLst/>
+            <a:off x="566928" y="1600200"/>
+            <a:ext cx="5440680" cy="2057400"/>
+          </a:xfrm>
+          <a:prstGeom prst="roundRect">
+            <a:avLst>
+              <a:gd name="adj" fmla="val 8000"/>
+            </a:avLst>
           </a:prstGeom>
           <a:solidFill>
-            <a:srgbClr val="2DD4BF"/>
+            <a:schemeClr val="bg1">
+              <a:lumMod val="85000"/>
+              <a:alpha val="94868"/>
+            </a:schemeClr>
           </a:solidFill>
           <a:ln>
             <a:noFill/>
@@ -30723,14 +31184,14 @@
       </p:sp>
       <p:sp>
         <p:nvSpPr>
-          <p:cNvPr id="3" name="TextBox 2"/>
+          <p:cNvPr id="5" name="TextBox 4"/>
           <p:cNvSpPr txBox="1"/>
           <p:nvPr/>
         </p:nvSpPr>
         <p:spPr>
           <a:xfrm>
-            <a:off x="777240" y="475488"/>
-            <a:ext cx="10515600" cy="731520"/>
+            <a:off x="932688" y="1828800"/>
+            <a:ext cx="914400" cy="640080"/>
           </a:xfrm>
           <a:prstGeom prst="rect">
             <a:avLst/>
@@ -30752,26 +31213,110 @@
               </a:spcAft>
             </a:pPr>
             <a:r>
-              <a:rPr sz="3200" b="1" i="0">
-                <a:solidFill>
-                  <a:srgbClr val="1F3759"/>
+              <a:rPr sz="3400" b="1" i="0">
+                <a:solidFill>
+                  <a:srgbClr val="2563EB"/>
                 </a:solidFill>
                 <a:latin typeface="Calibri"/>
               </a:rPr>
-              <a:t>Future Plans (Post Mid-Semester)</a:t>
-            </a:r>
-          </a:p>
-        </p:txBody>
-      </p:sp>
-      <p:sp>
-        <p:nvSpPr>
-          <p:cNvPr id="4" name="Rounded Rectangle 3"/>
+              <a:t>1</a:t>
+            </a:r>
+          </a:p>
+        </p:txBody>
+      </p:sp>
+      <p:sp>
+        <p:nvSpPr>
+          <p:cNvPr id="6" name="TextBox 5"/>
+          <p:cNvSpPr txBox="1"/>
+          <p:nvPr/>
+        </p:nvSpPr>
+        <p:spPr>
+          <a:xfrm>
+            <a:off x="1755648" y="1892807"/>
+            <a:ext cx="3977639" cy="548640"/>
+          </a:xfrm>
+          <a:prstGeom prst="rect">
+            <a:avLst/>
+          </a:prstGeom>
+          <a:noFill/>
+        </p:spPr>
+        <p:txBody>
+          <a:bodyPr wrap="square" lIns="0" tIns="0" rIns="0" bIns="0" anchor="t">
+            <a:spAutoFit/>
+          </a:bodyPr>
+          <a:lstStyle/>
+          <a:p>
+            <a:pPr algn="l">
+              <a:spcBef>
+                <a:spcPts val="0"/>
+              </a:spcBef>
+              <a:spcAft>
+                <a:spcPts val="200"/>
+              </a:spcAft>
+            </a:pPr>
+            <a:r>
+              <a:rPr sz="1500" b="1" i="0">
+                <a:solidFill>
+                  <a:srgbClr val="1F3759"/>
+                </a:solidFill>
+                <a:latin typeface="Calibri"/>
+              </a:rPr>
+              <a:t>Explainable AI (XAI)</a:t>
+            </a:r>
+          </a:p>
+        </p:txBody>
+      </p:sp>
+      <p:sp>
+        <p:nvSpPr>
+          <p:cNvPr id="7" name="TextBox 6"/>
+          <p:cNvSpPr txBox="1"/>
+          <p:nvPr/>
+        </p:nvSpPr>
+        <p:spPr>
+          <a:xfrm>
+            <a:off x="932688" y="2651760"/>
+            <a:ext cx="4709160" cy="914400"/>
+          </a:xfrm>
+          <a:prstGeom prst="rect">
+            <a:avLst/>
+          </a:prstGeom>
+          <a:noFill/>
+        </p:spPr>
+        <p:txBody>
+          <a:bodyPr wrap="square" lIns="0" tIns="0" rIns="0" bIns="0" anchor="t">
+            <a:spAutoFit/>
+          </a:bodyPr>
+          <a:lstStyle/>
+          <a:p>
+            <a:pPr algn="l">
+              <a:spcBef>
+                <a:spcPts val="0"/>
+              </a:spcBef>
+              <a:spcAft>
+                <a:spcPts val="200"/>
+              </a:spcAft>
+            </a:pPr>
+            <a:r>
+              <a:rPr sz="1200" b="0" i="0">
+                <a:solidFill>
+                  <a:srgbClr val="334155"/>
+                </a:solidFill>
+                <a:latin typeface="Calibri"/>
+              </a:rPr>
+              <a:t>SHAP values and attention-weight visualisation to map which technical / sentiment features drive each multi-step forecast.</a:t>
+            </a:r>
+          </a:p>
+        </p:txBody>
+      </p:sp>
+      <p:sp>
+        <p:nvSpPr>
+          <p:cNvPr id="8" name="Rounded Rectangle 7"/>
           <p:cNvSpPr/>
           <p:nvPr/>
         </p:nvSpPr>
         <p:spPr>
           <a:xfrm>
-            <a:off x="566928" y="1600200"/>
+            <a:off x="6254496" y="1600200"/>
             <a:ext cx="5440680" cy="2057400"/>
           </a:xfrm>
           <a:prstGeom prst="roundRect">
@@ -30815,13 +31360,13 @@
       </p:sp>
       <p:sp>
         <p:nvSpPr>
-          <p:cNvPr id="5" name="TextBox 4"/>
+          <p:cNvPr id="9" name="TextBox 8"/>
           <p:cNvSpPr txBox="1"/>
           <p:nvPr/>
         </p:nvSpPr>
         <p:spPr>
           <a:xfrm>
-            <a:off x="932688" y="1828800"/>
+            <a:off x="6620256" y="1828800"/>
             <a:ext cx="914400" cy="640080"/>
           </a:xfrm>
           <a:prstGeom prst="rect">
@@ -30846,24 +31391,24 @@
             <a:r>
               <a:rPr sz="3400" b="1" i="0">
                 <a:solidFill>
-                  <a:srgbClr val="2563EB"/>
+                  <a:srgbClr val="0891B2"/>
                 </a:solidFill>
                 <a:latin typeface="Calibri"/>
               </a:rPr>
-              <a:t>1</a:t>
-            </a:r>
-          </a:p>
-        </p:txBody>
-      </p:sp>
-      <p:sp>
-        <p:nvSpPr>
-          <p:cNvPr id="6" name="TextBox 5"/>
+              <a:t>2</a:t>
+            </a:r>
+          </a:p>
+        </p:txBody>
+      </p:sp>
+      <p:sp>
+        <p:nvSpPr>
+          <p:cNvPr id="10" name="TextBox 9"/>
           <p:cNvSpPr txBox="1"/>
           <p:nvPr/>
         </p:nvSpPr>
         <p:spPr>
           <a:xfrm>
-            <a:off x="1755648" y="1892807"/>
+            <a:off x="7443216" y="1892807"/>
             <a:ext cx="3977639" cy="548640"/>
           </a:xfrm>
           <a:prstGeom prst="rect">
@@ -30892,20 +31437,20 @@
                 </a:solidFill>
                 <a:latin typeface="Calibri"/>
               </a:rPr>
-              <a:t>Explainable AI (XAI)</a:t>
-            </a:r>
-          </a:p>
-        </p:txBody>
-      </p:sp>
-      <p:sp>
-        <p:nvSpPr>
-          <p:cNvPr id="7" name="TextBox 6"/>
+              <a:t>Denser &amp; richer sentiment</a:t>
+            </a:r>
+          </a:p>
+        </p:txBody>
+      </p:sp>
+      <p:sp>
+        <p:nvSpPr>
+          <p:cNvPr id="11" name="TextBox 10"/>
           <p:cNvSpPr txBox="1"/>
           <p:nvPr/>
         </p:nvSpPr>
         <p:spPr>
           <a:xfrm>
-            <a:off x="932688" y="2651760"/>
+            <a:off x="6620256" y="2651760"/>
             <a:ext cx="4709160" cy="914400"/>
           </a:xfrm>
           <a:prstGeom prst="rect">
@@ -30934,20 +31479,20 @@
                 </a:solidFill>
                 <a:latin typeface="Calibri"/>
               </a:rPr>
-              <a:t>SHAP values and attention-weight visualisation to map which technical / sentiment features drive each multi-step forecast.</a:t>
-            </a:r>
-          </a:p>
-        </p:txBody>
-      </p:sp>
-      <p:sp>
-        <p:nvSpPr>
-          <p:cNvPr id="8" name="Rounded Rectangle 7"/>
+              <a:t>Add a keyed news API (NewsAPI / Marketaux) and financial LLMs to lift coverage and capture deeper context than headlines.</a:t>
+            </a:r>
+          </a:p>
+        </p:txBody>
+      </p:sp>
+      <p:sp>
+        <p:nvSpPr>
+          <p:cNvPr id="12" name="Rounded Rectangle 11"/>
           <p:cNvSpPr/>
           <p:nvPr/>
         </p:nvSpPr>
         <p:spPr>
           <a:xfrm>
-            <a:off x="6254496" y="1600200"/>
+            <a:off x="566928" y="3886200"/>
             <a:ext cx="5440680" cy="2057400"/>
           </a:xfrm>
           <a:prstGeom prst="roundRect">
@@ -30991,13 +31536,13 @@
       </p:sp>
       <p:sp>
         <p:nvSpPr>
-          <p:cNvPr id="9" name="TextBox 8"/>
+          <p:cNvPr id="13" name="TextBox 12"/>
           <p:cNvSpPr txBox="1"/>
           <p:nvPr/>
         </p:nvSpPr>
         <p:spPr>
           <a:xfrm>
-            <a:off x="6620256" y="1828800"/>
+            <a:off x="932688" y="4114800"/>
             <a:ext cx="914400" cy="640080"/>
           </a:xfrm>
           <a:prstGeom prst="rect">
@@ -31022,24 +31567,24 @@
             <a:r>
               <a:rPr sz="3400" b="1" i="0">
                 <a:solidFill>
-                  <a:srgbClr val="0891B2"/>
+                  <a:srgbClr val="059669"/>
                 </a:solidFill>
                 <a:latin typeface="Calibri"/>
               </a:rPr>
-              <a:t>2</a:t>
-            </a:r>
-          </a:p>
-        </p:txBody>
-      </p:sp>
-      <p:sp>
-        <p:nvSpPr>
-          <p:cNvPr id="10" name="TextBox 9"/>
+              <a:t>3</a:t>
+            </a:r>
+          </a:p>
+        </p:txBody>
+      </p:sp>
+      <p:sp>
+        <p:nvSpPr>
+          <p:cNvPr id="14" name="TextBox 13"/>
           <p:cNvSpPr txBox="1"/>
           <p:nvPr/>
         </p:nvSpPr>
         <p:spPr>
           <a:xfrm>
-            <a:off x="7443216" y="1892807"/>
+            <a:off x="1755648" y="4178808"/>
             <a:ext cx="3977639" cy="548640"/>
           </a:xfrm>
           <a:prstGeom prst="rect">
@@ -31068,20 +31613,20 @@
                 </a:solidFill>
                 <a:latin typeface="Calibri"/>
               </a:rPr>
-              <a:t>Denser &amp; richer sentiment</a:t>
-            </a:r>
-          </a:p>
-        </p:txBody>
-      </p:sp>
-      <p:sp>
-        <p:nvSpPr>
-          <p:cNvPr id="11" name="TextBox 10"/>
+              <a:t>Ablation &amp; generalisation</a:t>
+            </a:r>
+          </a:p>
+        </p:txBody>
+      </p:sp>
+      <p:sp>
+        <p:nvSpPr>
+          <p:cNvPr id="15" name="TextBox 14"/>
           <p:cNvSpPr txBox="1"/>
           <p:nvPr/>
         </p:nvSpPr>
         <p:spPr>
           <a:xfrm>
-            <a:off x="6620256" y="2651760"/>
+            <a:off x="932688" y="4937760"/>
             <a:ext cx="4709160" cy="914400"/>
           </a:xfrm>
           <a:prstGeom prst="rect">
@@ -31110,20 +31655,20 @@
                 </a:solidFill>
                 <a:latin typeface="Calibri"/>
               </a:rPr>
-              <a:t>Add a keyed news API (NewsAPI / Marketaux) and financial LLMs to lift coverage and capture deeper context than headlines.</a:t>
-            </a:r>
-          </a:p>
-        </p:txBody>
-      </p:sp>
-      <p:sp>
-        <p:nvSpPr>
-          <p:cNvPr id="12" name="Rounded Rectangle 11"/>
+              <a:t>Systematic ablation of each component; extend beyond XAU/USD to more pairs and horizons.</a:t>
+            </a:r>
+          </a:p>
+        </p:txBody>
+      </p:sp>
+      <p:sp>
+        <p:nvSpPr>
+          <p:cNvPr id="16" name="Rounded Rectangle 15"/>
           <p:cNvSpPr/>
           <p:nvPr/>
         </p:nvSpPr>
         <p:spPr>
           <a:xfrm>
-            <a:off x="566928" y="3886200"/>
+            <a:off x="6254496" y="3886200"/>
             <a:ext cx="5440680" cy="2057400"/>
           </a:xfrm>
           <a:prstGeom prst="roundRect">
@@ -31167,13 +31712,13 @@
       </p:sp>
       <p:sp>
         <p:nvSpPr>
-          <p:cNvPr id="13" name="TextBox 12"/>
+          <p:cNvPr id="17" name="TextBox 16"/>
           <p:cNvSpPr txBox="1"/>
           <p:nvPr/>
         </p:nvSpPr>
         <p:spPr>
           <a:xfrm>
-            <a:off x="932688" y="4114800"/>
+            <a:off x="6620256" y="4114800"/>
             <a:ext cx="914400" cy="640080"/>
           </a:xfrm>
           <a:prstGeom prst="rect">
@@ -31198,24 +31743,24 @@
             <a:r>
               <a:rPr sz="3400" b="1" i="0">
                 <a:solidFill>
-                  <a:srgbClr val="059669"/>
+                  <a:srgbClr val="B45409"/>
                 </a:solidFill>
                 <a:latin typeface="Calibri"/>
               </a:rPr>
-              <a:t>3</a:t>
-            </a:r>
-          </a:p>
-        </p:txBody>
-      </p:sp>
-      <p:sp>
-        <p:nvSpPr>
-          <p:cNvPr id="14" name="TextBox 13"/>
+              <a:t>4</a:t>
+            </a:r>
+          </a:p>
+        </p:txBody>
+      </p:sp>
+      <p:sp>
+        <p:nvSpPr>
+          <p:cNvPr id="18" name="TextBox 17"/>
           <p:cNvSpPr txBox="1"/>
           <p:nvPr/>
         </p:nvSpPr>
         <p:spPr>
           <a:xfrm>
-            <a:off x="1755648" y="4178808"/>
+            <a:off x="7443216" y="4178808"/>
             <a:ext cx="3977639" cy="548640"/>
           </a:xfrm>
           <a:prstGeom prst="rect">
@@ -31244,20 +31789,20 @@
                 </a:solidFill>
                 <a:latin typeface="Calibri"/>
               </a:rPr>
-              <a:t>Ablation &amp; generalisation</a:t>
-            </a:r>
-          </a:p>
-        </p:txBody>
-      </p:sp>
-      <p:sp>
-        <p:nvSpPr>
-          <p:cNvPr id="15" name="TextBox 14"/>
+              <a:t>Reinforcement-learning execution</a:t>
+            </a:r>
+          </a:p>
+        </p:txBody>
+      </p:sp>
+      <p:sp>
+        <p:nvSpPr>
+          <p:cNvPr id="19" name="TextBox 18"/>
           <p:cNvSpPr txBox="1"/>
           <p:nvPr/>
         </p:nvSpPr>
         <p:spPr>
           <a:xfrm>
-            <a:off x="932688" y="4937760"/>
+            <a:off x="6620256" y="4937760"/>
             <a:ext cx="4709160" cy="914400"/>
           </a:xfrm>
           <a:prstGeom prst="rect">
@@ -31286,183 +31831,302 @@
                 </a:solidFill>
                 <a:latin typeface="Calibri"/>
               </a:rPr>
-              <a:t>Systematic ablation of each component; extend beyond XAU/USD to more pairs and horizons.</a:t>
-            </a:r>
-          </a:p>
-        </p:txBody>
-      </p:sp>
-      <p:sp>
-        <p:nvSpPr>
-          <p:cNvPr id="16" name="Rounded Rectangle 15"/>
-          <p:cNvSpPr/>
+              <a:t>Wrap the Hybrid in a DRL agent to learn position sizing &amp; stop-loss from its volatility forecasts.</a:t>
+            </a:r>
+          </a:p>
+        </p:txBody>
+      </p:sp>
+      <p:sp>
+        <p:nvSpPr>
+          <p:cNvPr id="21" name="Title 1">
+            <a:extLst>
+              <a:ext uri="{FF2B5EF4-FFF2-40B4-BE49-F238E27FC236}">
+                <a16:creationId xmlns:a16="http://schemas.microsoft.com/office/drawing/2014/main" id="{9DCFE403-FEF3-D479-BFE9-8A2887A7AA49}"/>
+              </a:ext>
+            </a:extLst>
+          </p:cNvPr>
+          <p:cNvSpPr txBox="1">
+            <a:spLocks/>
+          </p:cNvSpPr>
           <p:nvPr/>
         </p:nvSpPr>
         <p:spPr>
           <a:xfrm>
-            <a:off x="6254496" y="3886200"/>
-            <a:ext cx="5440680" cy="2057400"/>
-          </a:xfrm>
-          <a:prstGeom prst="roundRect">
-            <a:avLst>
-              <a:gd name="adj" fmla="val 8000"/>
-            </a:avLst>
-          </a:prstGeom>
-          <a:solidFill>
-            <a:schemeClr val="bg1">
-              <a:lumMod val="85000"/>
-              <a:alpha val="94868"/>
-            </a:schemeClr>
-          </a:solidFill>
+            <a:off x="468739" y="593930"/>
+            <a:ext cx="6228806" cy="640940"/>
+          </a:xfrm>
+          <a:prstGeom prst="rect">
+            <a:avLst/>
+          </a:prstGeom>
+          <a:noFill/>
           <a:ln>
             <a:noFill/>
           </a:ln>
-          <a:effectLst/>
-        </p:spPr>
-        <p:style>
-          <a:lnRef idx="1">
-            <a:schemeClr val="accent1"/>
-          </a:lnRef>
-          <a:fillRef idx="3">
-            <a:schemeClr val="accent1"/>
-          </a:fillRef>
-          <a:effectRef idx="2">
-            <a:schemeClr val="accent1"/>
-          </a:effectRef>
-          <a:fontRef idx="minor">
-            <a:schemeClr val="lt1"/>
-          </a:fontRef>
-        </p:style>
-        <p:txBody>
-          <a:bodyPr rtlCol="0" anchor="ctr"/>
-          <a:lstStyle/>
-          <a:p>
-            <a:pPr algn="ctr"/>
-            <a:endParaRPr/>
-          </a:p>
-        </p:txBody>
-      </p:sp>
-      <p:sp>
-        <p:nvSpPr>
-          <p:cNvPr id="17" name="TextBox 16"/>
-          <p:cNvSpPr txBox="1"/>
-          <p:nvPr/>
-        </p:nvSpPr>
-        <p:spPr>
-          <a:xfrm>
-            <a:off x="6620256" y="4114800"/>
-            <a:ext cx="914400" cy="640080"/>
-          </a:xfrm>
-          <a:prstGeom prst="rect">
-            <a:avLst/>
-          </a:prstGeom>
-          <a:noFill/>
-        </p:spPr>
-        <p:txBody>
-          <a:bodyPr wrap="square" lIns="0" tIns="0" rIns="0" bIns="0" anchor="t">
-            <a:spAutoFit/>
+        </p:spPr>
+        <p:txBody>
+          <a:bodyPr spcFirstLastPara="1" wrap="square" lIns="91425" tIns="45700" rIns="91425" bIns="45700" anchor="ctr" anchorCtr="0">
+            <a:normAutofit/>
           </a:bodyPr>
-          <a:lstStyle/>
-          <a:p>
-            <a:pPr algn="l">
-              <a:spcBef>
-                <a:spcPts val="0"/>
-              </a:spcBef>
-              <a:spcAft>
-                <a:spcPts val="200"/>
-              </a:spcAft>
-            </a:pPr>
-            <a:r>
-              <a:rPr sz="3400" b="1" i="0">
-                <a:solidFill>
-                  <a:srgbClr val="B45409"/>
+          <a:lstStyle>
+            <a:defPPr marR="0" lvl="0" algn="l" rtl="0">
+              <a:lnSpc>
+                <a:spcPct val="100000"/>
+              </a:lnSpc>
+              <a:spcBef>
+                <a:spcPts val="0"/>
+              </a:spcBef>
+              <a:spcAft>
+                <a:spcPts val="0"/>
+              </a:spcAft>
+            </a:defPPr>
+            <a:lvl1pPr marR="0" lvl="0" algn="ctr" rtl="0">
+              <a:lnSpc>
+                <a:spcPct val="100000"/>
+              </a:lnSpc>
+              <a:spcBef>
+                <a:spcPts val="0"/>
+              </a:spcBef>
+              <a:spcAft>
+                <a:spcPts val="0"/>
+              </a:spcAft>
+              <a:buClr>
+                <a:schemeClr val="dk1"/>
+              </a:buClr>
+              <a:buSzPts val="1800"/>
+              <a:buFont typeface="Calibri"/>
+              <a:buNone/>
+              <a:defRPr sz="4400" b="0" i="0" u="none" strike="noStrike" cap="none">
+                <a:solidFill>
+                  <a:schemeClr val="dk1"/>
                 </a:solidFill>
                 <a:latin typeface="Calibri"/>
+                <a:ea typeface="Calibri"/>
+                <a:cs typeface="Calibri"/>
+                <a:sym typeface="Calibri"/>
+              </a:defRPr>
+            </a:lvl1pPr>
+            <a:lvl2pPr marR="0" lvl="1" algn="l" rtl="0">
+              <a:lnSpc>
+                <a:spcPct val="100000"/>
+              </a:lnSpc>
+              <a:spcBef>
+                <a:spcPts val="0"/>
+              </a:spcBef>
+              <a:spcAft>
+                <a:spcPts val="0"/>
+              </a:spcAft>
+              <a:buClr>
+                <a:srgbClr val="000000"/>
+              </a:buClr>
+              <a:buSzPts val="1400"/>
+              <a:buFont typeface="Arial"/>
+              <a:buNone/>
+              <a:defRPr sz="1800" b="0" i="0" u="none" strike="noStrike" cap="none">
+                <a:solidFill>
+                  <a:srgbClr val="000000"/>
+                </a:solidFill>
+                <a:latin typeface="Arial"/>
+                <a:ea typeface="Arial"/>
+                <a:cs typeface="Arial"/>
+                <a:sym typeface="Arial"/>
+              </a:defRPr>
+            </a:lvl2pPr>
+            <a:lvl3pPr marR="0" lvl="2" algn="l" rtl="0">
+              <a:lnSpc>
+                <a:spcPct val="100000"/>
+              </a:lnSpc>
+              <a:spcBef>
+                <a:spcPts val="0"/>
+              </a:spcBef>
+              <a:spcAft>
+                <a:spcPts val="0"/>
+              </a:spcAft>
+              <a:buClr>
+                <a:srgbClr val="000000"/>
+              </a:buClr>
+              <a:buSzPts val="1400"/>
+              <a:buFont typeface="Arial"/>
+              <a:buNone/>
+              <a:defRPr sz="1800" b="0" i="0" u="none" strike="noStrike" cap="none">
+                <a:solidFill>
+                  <a:srgbClr val="000000"/>
+                </a:solidFill>
+                <a:latin typeface="Arial"/>
+                <a:ea typeface="Arial"/>
+                <a:cs typeface="Arial"/>
+                <a:sym typeface="Arial"/>
+              </a:defRPr>
+            </a:lvl3pPr>
+            <a:lvl4pPr marR="0" lvl="3" algn="l" rtl="0">
+              <a:lnSpc>
+                <a:spcPct val="100000"/>
+              </a:lnSpc>
+              <a:spcBef>
+                <a:spcPts val="0"/>
+              </a:spcBef>
+              <a:spcAft>
+                <a:spcPts val="0"/>
+              </a:spcAft>
+              <a:buClr>
+                <a:srgbClr val="000000"/>
+              </a:buClr>
+              <a:buSzPts val="1400"/>
+              <a:buFont typeface="Arial"/>
+              <a:buNone/>
+              <a:defRPr sz="1800" b="0" i="0" u="none" strike="noStrike" cap="none">
+                <a:solidFill>
+                  <a:srgbClr val="000000"/>
+                </a:solidFill>
+                <a:latin typeface="Arial"/>
+                <a:ea typeface="Arial"/>
+                <a:cs typeface="Arial"/>
+                <a:sym typeface="Arial"/>
+              </a:defRPr>
+            </a:lvl4pPr>
+            <a:lvl5pPr marR="0" lvl="4" algn="l" rtl="0">
+              <a:lnSpc>
+                <a:spcPct val="100000"/>
+              </a:lnSpc>
+              <a:spcBef>
+                <a:spcPts val="0"/>
+              </a:spcBef>
+              <a:spcAft>
+                <a:spcPts val="0"/>
+              </a:spcAft>
+              <a:buClr>
+                <a:srgbClr val="000000"/>
+              </a:buClr>
+              <a:buSzPts val="1400"/>
+              <a:buFont typeface="Arial"/>
+              <a:buNone/>
+              <a:defRPr sz="1800" b="0" i="0" u="none" strike="noStrike" cap="none">
+                <a:solidFill>
+                  <a:srgbClr val="000000"/>
+                </a:solidFill>
+                <a:latin typeface="Arial"/>
+                <a:ea typeface="Arial"/>
+                <a:cs typeface="Arial"/>
+                <a:sym typeface="Arial"/>
+              </a:defRPr>
+            </a:lvl5pPr>
+            <a:lvl6pPr marR="0" lvl="5" algn="l" rtl="0">
+              <a:lnSpc>
+                <a:spcPct val="100000"/>
+              </a:lnSpc>
+              <a:spcBef>
+                <a:spcPts val="0"/>
+              </a:spcBef>
+              <a:spcAft>
+                <a:spcPts val="0"/>
+              </a:spcAft>
+              <a:buClr>
+                <a:srgbClr val="000000"/>
+              </a:buClr>
+              <a:buSzPts val="1400"/>
+              <a:buFont typeface="Arial"/>
+              <a:buNone/>
+              <a:defRPr sz="1800" b="0" i="0" u="none" strike="noStrike" cap="none">
+                <a:solidFill>
+                  <a:srgbClr val="000000"/>
+                </a:solidFill>
+                <a:latin typeface="Arial"/>
+                <a:ea typeface="Arial"/>
+                <a:cs typeface="Arial"/>
+                <a:sym typeface="Arial"/>
+              </a:defRPr>
+            </a:lvl6pPr>
+            <a:lvl7pPr marR="0" lvl="6" algn="l" rtl="0">
+              <a:lnSpc>
+                <a:spcPct val="100000"/>
+              </a:lnSpc>
+              <a:spcBef>
+                <a:spcPts val="0"/>
+              </a:spcBef>
+              <a:spcAft>
+                <a:spcPts val="0"/>
+              </a:spcAft>
+              <a:buClr>
+                <a:srgbClr val="000000"/>
+              </a:buClr>
+              <a:buSzPts val="1400"/>
+              <a:buFont typeface="Arial"/>
+              <a:buNone/>
+              <a:defRPr sz="1800" b="0" i="0" u="none" strike="noStrike" cap="none">
+                <a:solidFill>
+                  <a:srgbClr val="000000"/>
+                </a:solidFill>
+                <a:latin typeface="Arial"/>
+                <a:ea typeface="Arial"/>
+                <a:cs typeface="Arial"/>
+                <a:sym typeface="Arial"/>
+              </a:defRPr>
+            </a:lvl7pPr>
+            <a:lvl8pPr marR="0" lvl="7" algn="l" rtl="0">
+              <a:lnSpc>
+                <a:spcPct val="100000"/>
+              </a:lnSpc>
+              <a:spcBef>
+                <a:spcPts val="0"/>
+              </a:spcBef>
+              <a:spcAft>
+                <a:spcPts val="0"/>
+              </a:spcAft>
+              <a:buClr>
+                <a:srgbClr val="000000"/>
+              </a:buClr>
+              <a:buSzPts val="1400"/>
+              <a:buFont typeface="Arial"/>
+              <a:buNone/>
+              <a:defRPr sz="1800" b="0" i="0" u="none" strike="noStrike" cap="none">
+                <a:solidFill>
+                  <a:srgbClr val="000000"/>
+                </a:solidFill>
+                <a:latin typeface="Arial"/>
+                <a:ea typeface="Arial"/>
+                <a:cs typeface="Arial"/>
+                <a:sym typeface="Arial"/>
+              </a:defRPr>
+            </a:lvl8pPr>
+            <a:lvl9pPr marR="0" lvl="8" algn="l" rtl="0">
+              <a:lnSpc>
+                <a:spcPct val="100000"/>
+              </a:lnSpc>
+              <a:spcBef>
+                <a:spcPts val="0"/>
+              </a:spcBef>
+              <a:spcAft>
+                <a:spcPts val="0"/>
+              </a:spcAft>
+              <a:buClr>
+                <a:srgbClr val="000000"/>
+              </a:buClr>
+              <a:buSzPts val="1400"/>
+              <a:buFont typeface="Arial"/>
+              <a:buNone/>
+              <a:defRPr sz="1800" b="0" i="0" u="none" strike="noStrike" cap="none">
+                <a:solidFill>
+                  <a:srgbClr val="000000"/>
+                </a:solidFill>
+                <a:latin typeface="Arial"/>
+                <a:ea typeface="Arial"/>
+                <a:cs typeface="Arial"/>
+                <a:sym typeface="Arial"/>
+              </a:defRPr>
+            </a:lvl9pPr>
+          </a:lstStyle>
+          <a:p>
+            <a:pPr algn="l"/>
+            <a:r>
+              <a:rPr lang="en-US" sz="3200" dirty="0">
+                <a:solidFill>
+                  <a:schemeClr val="bg2">
+                    <a:lumMod val="75000"/>
+                  </a:schemeClr>
+                </a:solidFill>
+                <a:latin typeface="Calibri" panose="020F0502020204030204" pitchFamily="34" charset="0"/>
+                <a:cs typeface="Calibri" panose="020F0502020204030204" pitchFamily="34" charset="0"/>
               </a:rPr>
-              <a:t>4</a:t>
-            </a:r>
-          </a:p>
-        </p:txBody>
-      </p:sp>
-      <p:sp>
-        <p:nvSpPr>
-          <p:cNvPr id="18" name="TextBox 17"/>
-          <p:cNvSpPr txBox="1"/>
-          <p:nvPr/>
-        </p:nvSpPr>
-        <p:spPr>
-          <a:xfrm>
-            <a:off x="7443216" y="4178808"/>
-            <a:ext cx="3977639" cy="548640"/>
-          </a:xfrm>
-          <a:prstGeom prst="rect">
-            <a:avLst/>
-          </a:prstGeom>
-          <a:noFill/>
-        </p:spPr>
-        <p:txBody>
-          <a:bodyPr wrap="square" lIns="0" tIns="0" rIns="0" bIns="0" anchor="t">
-            <a:spAutoFit/>
-          </a:bodyPr>
-          <a:lstStyle/>
-          <a:p>
-            <a:pPr algn="l">
-              <a:spcBef>
-                <a:spcPts val="0"/>
-              </a:spcBef>
-              <a:spcAft>
-                <a:spcPts val="200"/>
-              </a:spcAft>
-            </a:pPr>
-            <a:r>
-              <a:rPr sz="1500" b="1" i="0">
-                <a:solidFill>
-                  <a:srgbClr val="1F3759"/>
-                </a:solidFill>
-                <a:latin typeface="Calibri"/>
-              </a:rPr>
-              <a:t>Reinforcement-learning execution</a:t>
-            </a:r>
-          </a:p>
-        </p:txBody>
-      </p:sp>
-      <p:sp>
-        <p:nvSpPr>
-          <p:cNvPr id="19" name="TextBox 18"/>
-          <p:cNvSpPr txBox="1"/>
-          <p:nvPr/>
-        </p:nvSpPr>
-        <p:spPr>
-          <a:xfrm>
-            <a:off x="6620256" y="4937760"/>
-            <a:ext cx="4709160" cy="914400"/>
-          </a:xfrm>
-          <a:prstGeom prst="rect">
-            <a:avLst/>
-          </a:prstGeom>
-          <a:noFill/>
-        </p:spPr>
-        <p:txBody>
-          <a:bodyPr wrap="square" lIns="0" tIns="0" rIns="0" bIns="0" anchor="t">
-            <a:spAutoFit/>
-          </a:bodyPr>
-          <a:lstStyle/>
-          <a:p>
-            <a:pPr algn="l">
-              <a:spcBef>
-                <a:spcPts val="0"/>
-              </a:spcBef>
-              <a:spcAft>
-                <a:spcPts val="200"/>
-              </a:spcAft>
-            </a:pPr>
-            <a:r>
-              <a:rPr sz="1200" b="0" i="0">
-                <a:solidFill>
-                  <a:srgbClr val="334155"/>
-                </a:solidFill>
-                <a:latin typeface="Calibri"/>
-              </a:rPr>
-              <a:t>Wrap the Hybrid in a DRL agent to learn position sizing &amp; stop-loss from its volatility forecasts.</a:t>
+              <a:t>Future Plans (Post Dissertation)</a:t>
             </a:r>
           </a:p>
         </p:txBody>
@@ -31494,20 +32158,73 @@
       </p:grpSpPr>
       <p:sp>
         <p:nvSpPr>
-          <p:cNvPr id="2" name="Rectangle 1"/>
+          <p:cNvPr id="4" name="TextBox 3"/>
+          <p:cNvSpPr txBox="1"/>
+          <p:nvPr/>
+        </p:nvSpPr>
+        <p:spPr>
+          <a:xfrm>
+            <a:off x="777240" y="1170432"/>
+            <a:ext cx="10607040" cy="365760"/>
+          </a:xfrm>
+          <a:prstGeom prst="rect">
+            <a:avLst/>
+          </a:prstGeom>
+          <a:noFill/>
+        </p:spPr>
+        <p:txBody>
+          <a:bodyPr wrap="square" lIns="0" tIns="0" rIns="0" bIns="0" anchor="t">
+            <a:spAutoFit/>
+          </a:bodyPr>
+          <a:lstStyle>
+            <a:defPPr marR="0" lvl="0" algn="l" rtl="0">
+              <a:lnSpc>
+                <a:spcPct val="100000"/>
+              </a:lnSpc>
+              <a:spcBef>
+                <a:spcPts val="0"/>
+              </a:spcBef>
+              <a:spcAft>
+                <a:spcPts val="0"/>
+              </a:spcAft>
+              <a:defRPr/>
+            </a:defPPr>
+            <a:lvl1pPr>
+              <a:spcAft>
+                <a:spcPts val="200"/>
+              </a:spcAft>
+              <a:defRPr i="1">
+                <a:solidFill>
+                  <a:schemeClr val="bg2"/>
+                </a:solidFill>
+                <a:latin typeface="Calibri"/>
+              </a:defRPr>
+            </a:lvl1pPr>
+          </a:lstStyle>
+          <a:p>
+            <a:r>
+              <a:rPr dirty="0"/>
+              <a:t>From data pipeline to mid-term, and the road to final submission</a:t>
+            </a:r>
+          </a:p>
+        </p:txBody>
+      </p:sp>
+      <p:sp>
+        <p:nvSpPr>
+          <p:cNvPr id="5" name="Rectangle 4"/>
           <p:cNvSpPr/>
           <p:nvPr/>
         </p:nvSpPr>
         <p:spPr>
           <a:xfrm>
-            <a:off x="566928" y="548640"/>
-            <a:ext cx="82296" cy="502920"/>
+            <a:off x="822960" y="3218688"/>
+            <a:ext cx="10424160" cy="45720"/>
           </a:xfrm>
           <a:prstGeom prst="rect">
             <a:avLst/>
           </a:prstGeom>
           <a:solidFill>
-            <a:srgbClr val="2DD4BF"/>
+            <a:srgbClr val="64748B"/>
           </a:solidFill>
           <a:ln>
             <a:noFill/>
@@ -31539,104 +32256,20 @@
       </p:sp>
       <p:sp>
         <p:nvSpPr>
-          <p:cNvPr id="3" name="TextBox 2"/>
-          <p:cNvSpPr txBox="1"/>
-          <p:nvPr/>
-        </p:nvSpPr>
-        <p:spPr>
-          <a:xfrm>
-            <a:off x="777240" y="475488"/>
-            <a:ext cx="10515600" cy="731520"/>
-          </a:xfrm>
-          <a:prstGeom prst="rect">
-            <a:avLst/>
-          </a:prstGeom>
-          <a:noFill/>
-        </p:spPr>
-        <p:txBody>
-          <a:bodyPr wrap="square" lIns="0" tIns="0" rIns="0" bIns="0" anchor="t">
-            <a:spAutoFit/>
-          </a:bodyPr>
-          <a:lstStyle/>
-          <a:p>
-            <a:pPr algn="l">
-              <a:spcBef>
-                <a:spcPts val="0"/>
-              </a:spcBef>
-              <a:spcAft>
-                <a:spcPts val="200"/>
-              </a:spcAft>
-            </a:pPr>
-            <a:r>
-              <a:rPr sz="3200" b="1" i="0">
-                <a:solidFill>
-                  <a:srgbClr val="1F3759"/>
-                </a:solidFill>
-                <a:latin typeface="Calibri"/>
-              </a:rPr>
-              <a:t>Project Timeline</a:t>
-            </a:r>
-          </a:p>
-        </p:txBody>
-      </p:sp>
-      <p:sp>
-        <p:nvSpPr>
-          <p:cNvPr id="4" name="TextBox 3"/>
-          <p:cNvSpPr txBox="1"/>
-          <p:nvPr/>
-        </p:nvSpPr>
-        <p:spPr>
-          <a:xfrm>
-            <a:off x="777240" y="1170432"/>
-            <a:ext cx="10607040" cy="365760"/>
-          </a:xfrm>
-          <a:prstGeom prst="rect">
-            <a:avLst/>
-          </a:prstGeom>
-          <a:noFill/>
-        </p:spPr>
-        <p:txBody>
-          <a:bodyPr wrap="square" lIns="0" tIns="0" rIns="0" bIns="0" anchor="t">
-            <a:spAutoFit/>
-          </a:bodyPr>
-          <a:lstStyle/>
-          <a:p>
-            <a:pPr algn="l">
-              <a:spcBef>
-                <a:spcPts val="0"/>
-              </a:spcBef>
-              <a:spcAft>
-                <a:spcPts val="200"/>
-              </a:spcAft>
-            </a:pPr>
-            <a:r>
-              <a:rPr sz="1300" b="0" i="1">
-                <a:solidFill>
-                  <a:srgbClr val="64748B"/>
-                </a:solidFill>
-                <a:latin typeface="Calibri"/>
-              </a:rPr>
-              <a:t>From data pipeline to mid-term, and the road to final submission</a:t>
-            </a:r>
-          </a:p>
-        </p:txBody>
-      </p:sp>
-      <p:sp>
-        <p:nvSpPr>
-          <p:cNvPr id="5" name="Rectangle 4"/>
+          <p:cNvPr id="6" name="Oval 5"/>
           <p:cNvSpPr/>
           <p:nvPr/>
         </p:nvSpPr>
         <p:spPr>
           <a:xfrm>
-            <a:off x="822960" y="3218688"/>
-            <a:ext cx="10424160" cy="45720"/>
-          </a:xfrm>
-          <a:prstGeom prst="rect">
+            <a:off x="1997964" y="3099816"/>
+            <a:ext cx="274320" cy="274320"/>
+          </a:xfrm>
+          <a:prstGeom prst="ellipse">
             <a:avLst/>
           </a:prstGeom>
           <a:solidFill>
-            <a:srgbClr val="64748B"/>
+            <a:srgbClr val="2DD4BF"/>
           </a:solidFill>
           <a:ln>
             <a:noFill/>
@@ -31668,20 +32301,64 @@
       </p:sp>
       <p:sp>
         <p:nvSpPr>
-          <p:cNvPr id="6" name="Oval 5"/>
+          <p:cNvPr id="7" name="TextBox 6"/>
+          <p:cNvSpPr txBox="1"/>
+          <p:nvPr/>
+        </p:nvSpPr>
+        <p:spPr>
+          <a:xfrm>
+            <a:off x="1997964" y="3081528"/>
+            <a:ext cx="274320" cy="274320"/>
+          </a:xfrm>
+          <a:prstGeom prst="rect">
+            <a:avLst/>
+          </a:prstGeom>
+          <a:noFill/>
+        </p:spPr>
+        <p:txBody>
+          <a:bodyPr wrap="square" lIns="0" tIns="0" rIns="0" bIns="0" anchor="ctr">
+            <a:spAutoFit/>
+          </a:bodyPr>
+          <a:lstStyle/>
+          <a:p>
+            <a:pPr algn="ctr">
+              <a:spcBef>
+                <a:spcPts val="0"/>
+              </a:spcBef>
+              <a:spcAft>
+                <a:spcPts val="200"/>
+              </a:spcAft>
+            </a:pPr>
+            <a:r>
+              <a:rPr sz="1300" b="1" i="0">
+                <a:solidFill>
+                  <a:srgbClr val="FFFFFF"/>
+                </a:solidFill>
+                <a:latin typeface="Calibri"/>
+              </a:rPr>
+              <a:t>✓</a:t>
+            </a:r>
+          </a:p>
+        </p:txBody>
+      </p:sp>
+      <p:sp>
+        <p:nvSpPr>
+          <p:cNvPr id="8" name="Rounded Rectangle 7"/>
           <p:cNvSpPr/>
           <p:nvPr/>
         </p:nvSpPr>
         <p:spPr>
           <a:xfrm>
-            <a:off x="1997964" y="3099816"/>
-            <a:ext cx="274320" cy="274320"/>
-          </a:xfrm>
-          <a:prstGeom prst="ellipse">
-            <a:avLst/>
+            <a:off x="1005840" y="1645919"/>
+            <a:ext cx="2286000" cy="1371600"/>
+          </a:xfrm>
+          <a:prstGeom prst="roundRect">
+            <a:avLst>
+              <a:gd name="adj" fmla="val 8000"/>
+            </a:avLst>
           </a:prstGeom>
           <a:solidFill>
-            <a:srgbClr val="2DD4BF"/>
+            <a:srgbClr val="1E2738"/>
           </a:solidFill>
           <a:ln>
             <a:noFill/>
@@ -31713,14 +32390,14 @@
       </p:sp>
       <p:sp>
         <p:nvSpPr>
-          <p:cNvPr id="7" name="TextBox 6"/>
+          <p:cNvPr id="9" name="TextBox 8"/>
           <p:cNvSpPr txBox="1"/>
           <p:nvPr/>
         </p:nvSpPr>
         <p:spPr>
           <a:xfrm>
-            <a:off x="1997964" y="3081528"/>
-            <a:ext cx="274320" cy="274320"/>
+            <a:off x="1188720" y="1810511"/>
+            <a:ext cx="1965960" cy="176972"/>
           </a:xfrm>
           <a:prstGeom prst="rect">
             <a:avLst/>
@@ -31728,12 +32405,12 @@
           <a:noFill/>
         </p:spPr>
         <p:txBody>
-          <a:bodyPr wrap="square" lIns="0" tIns="0" rIns="0" bIns="0" anchor="ctr">
+          <a:bodyPr wrap="square" lIns="0" tIns="0" rIns="0" bIns="0" anchor="t">
             <a:spAutoFit/>
           </a:bodyPr>
           <a:lstStyle/>
           <a:p>
-            <a:pPr algn="ctr">
+            <a:pPr algn="l">
               <a:spcBef>
                 <a:spcPts val="0"/>
               </a:spcBef>
@@ -31742,35 +32419,135 @@
               </a:spcAft>
             </a:pPr>
             <a:r>
-              <a:rPr sz="1300" b="1" i="0">
-                <a:solidFill>
-                  <a:srgbClr val="FFFFFF"/>
+              <a:rPr sz="1150" b="1" i="0" dirty="0">
+                <a:solidFill>
+                  <a:srgbClr val="2DD4BF"/>
                 </a:solidFill>
                 <a:latin typeface="Calibri"/>
               </a:rPr>
-              <a:t>✓</a:t>
-            </a:r>
-          </a:p>
-        </p:txBody>
-      </p:sp>
-      <p:sp>
-        <p:nvSpPr>
-          <p:cNvPr id="8" name="Rounded Rectangle 7"/>
+              <a:t>May – </a:t>
+            </a:r>
+            <a:r>
+              <a:rPr lang="en-US" sz="1150" b="1" i="0" dirty="0">
+                <a:solidFill>
+                  <a:srgbClr val="2DD4BF"/>
+                </a:solidFill>
+                <a:latin typeface="Calibri"/>
+              </a:rPr>
+              <a:t>May</a:t>
+            </a:r>
+            <a:r>
+              <a:rPr sz="1150" b="1" i="0" dirty="0">
+                <a:solidFill>
+                  <a:srgbClr val="2DD4BF"/>
+                </a:solidFill>
+                <a:latin typeface="Calibri"/>
+              </a:rPr>
+              <a:t> 2026</a:t>
+            </a:r>
+          </a:p>
+        </p:txBody>
+      </p:sp>
+      <p:sp>
+        <p:nvSpPr>
+          <p:cNvPr id="10" name="TextBox 9"/>
+          <p:cNvSpPr txBox="1"/>
+          <p:nvPr/>
+        </p:nvSpPr>
+        <p:spPr>
+          <a:xfrm>
+            <a:off x="1188720" y="2103120"/>
+            <a:ext cx="1965960" cy="274320"/>
+          </a:xfrm>
+          <a:prstGeom prst="rect">
+            <a:avLst/>
+          </a:prstGeom>
+          <a:noFill/>
+        </p:spPr>
+        <p:txBody>
+          <a:bodyPr wrap="square" lIns="0" tIns="0" rIns="0" bIns="0" anchor="t">
+            <a:spAutoFit/>
+          </a:bodyPr>
+          <a:lstStyle/>
+          <a:p>
+            <a:pPr algn="l">
+              <a:spcBef>
+                <a:spcPts val="0"/>
+              </a:spcBef>
+              <a:spcAft>
+                <a:spcPts val="200"/>
+              </a:spcAft>
+            </a:pPr>
+            <a:r>
+              <a:rPr sz="1250" b="1" i="0">
+                <a:solidFill>
+                  <a:srgbClr val="FFFFFF"/>
+                </a:solidFill>
+                <a:latin typeface="Calibri"/>
+              </a:rPr>
+              <a:t>Data &amp; baselines</a:t>
+            </a:r>
+          </a:p>
+        </p:txBody>
+      </p:sp>
+      <p:sp>
+        <p:nvSpPr>
+          <p:cNvPr id="11" name="TextBox 10"/>
+          <p:cNvSpPr txBox="1"/>
+          <p:nvPr/>
+        </p:nvSpPr>
+        <p:spPr>
+          <a:xfrm>
+            <a:off x="1188720" y="2395727"/>
+            <a:ext cx="1965960" cy="548640"/>
+          </a:xfrm>
+          <a:prstGeom prst="rect">
+            <a:avLst/>
+          </a:prstGeom>
+          <a:noFill/>
+        </p:spPr>
+        <p:txBody>
+          <a:bodyPr wrap="square" lIns="0" tIns="0" rIns="0" bIns="0" anchor="t">
+            <a:spAutoFit/>
+          </a:bodyPr>
+          <a:lstStyle/>
+          <a:p>
+            <a:pPr algn="l">
+              <a:spcBef>
+                <a:spcPts val="0"/>
+              </a:spcBef>
+              <a:spcAft>
+                <a:spcPts val="200"/>
+              </a:spcAft>
+            </a:pPr>
+            <a:r>
+              <a:rPr sz="1100" b="0" i="0">
+                <a:solidFill>
+                  <a:srgbClr val="CBD5E1"/>
+                </a:solidFill>
+                <a:latin typeface="Calibri"/>
+              </a:rPr>
+              <a:t>Two-pipeline data, FinBERT scoring, initial Hybrid.</a:t>
+            </a:r>
+          </a:p>
+        </p:txBody>
+      </p:sp>
+      <p:sp>
+        <p:nvSpPr>
+          <p:cNvPr id="12" name="Oval 11"/>
           <p:cNvSpPr/>
           <p:nvPr/>
         </p:nvSpPr>
         <p:spPr>
           <a:xfrm>
-            <a:off x="1005840" y="1645919"/>
-            <a:ext cx="2286000" cy="1371600"/>
-          </a:xfrm>
-          <a:prstGeom prst="roundRect">
-            <a:avLst>
-              <a:gd name="adj" fmla="val 8000"/>
-            </a:avLst>
+            <a:off x="4604004" y="3099816"/>
+            <a:ext cx="274320" cy="274320"/>
+          </a:xfrm>
+          <a:prstGeom prst="ellipse">
+            <a:avLst/>
           </a:prstGeom>
           <a:solidFill>
-            <a:srgbClr val="1E2738"/>
+            <a:srgbClr val="0891B2"/>
           </a:solidFill>
           <a:ln>
             <a:noFill/>
@@ -31802,14 +32579,14 @@
       </p:sp>
       <p:sp>
         <p:nvSpPr>
-          <p:cNvPr id="9" name="TextBox 8"/>
+          <p:cNvPr id="13" name="TextBox 12"/>
           <p:cNvSpPr txBox="1"/>
           <p:nvPr/>
         </p:nvSpPr>
         <p:spPr>
           <a:xfrm>
-            <a:off x="1188720" y="1810511"/>
-            <a:ext cx="1965960" cy="274320"/>
+            <a:off x="4604004" y="3081528"/>
+            <a:ext cx="274320" cy="274320"/>
           </a:xfrm>
           <a:prstGeom prst="rect">
             <a:avLst/>
@@ -31817,12 +32594,12 @@
           <a:noFill/>
         </p:spPr>
         <p:txBody>
-          <a:bodyPr wrap="square" lIns="0" tIns="0" rIns="0" bIns="0" anchor="t">
+          <a:bodyPr wrap="square" lIns="0" tIns="0" rIns="0" bIns="0" anchor="ctr">
             <a:spAutoFit/>
           </a:bodyPr>
           <a:lstStyle/>
           <a:p>
-            <a:pPr algn="l">
+            <a:pPr algn="ctr">
               <a:spcBef>
                 <a:spcPts val="0"/>
               </a:spcBef>
@@ -31831,117 +32608,35 @@
               </a:spcAft>
             </a:pPr>
             <a:r>
-              <a:rPr sz="1150" b="1" i="0">
-                <a:solidFill>
-                  <a:srgbClr val="2DD4BF"/>
+              <a:rPr sz="1300" b="1" i="0">
+                <a:solidFill>
+                  <a:srgbClr val="FFFFFF"/>
                 </a:solidFill>
                 <a:latin typeface="Calibri"/>
               </a:rPr>
-              <a:t>May – Jun 2026</a:t>
-            </a:r>
-          </a:p>
-        </p:txBody>
-      </p:sp>
-      <p:sp>
-        <p:nvSpPr>
-          <p:cNvPr id="10" name="TextBox 9"/>
-          <p:cNvSpPr txBox="1"/>
-          <p:nvPr/>
-        </p:nvSpPr>
-        <p:spPr>
-          <a:xfrm>
-            <a:off x="1188720" y="2103120"/>
-            <a:ext cx="1965960" cy="274320"/>
-          </a:xfrm>
-          <a:prstGeom prst="rect">
-            <a:avLst/>
-          </a:prstGeom>
-          <a:noFill/>
-        </p:spPr>
-        <p:txBody>
-          <a:bodyPr wrap="square" lIns="0" tIns="0" rIns="0" bIns="0" anchor="t">
-            <a:spAutoFit/>
-          </a:bodyPr>
-          <a:lstStyle/>
-          <a:p>
-            <a:pPr algn="l">
-              <a:spcBef>
-                <a:spcPts val="0"/>
-              </a:spcBef>
-              <a:spcAft>
-                <a:spcPts val="200"/>
-              </a:spcAft>
-            </a:pPr>
-            <a:r>
-              <a:rPr sz="1250" b="1" i="0">
-                <a:solidFill>
-                  <a:srgbClr val="FFFFFF"/>
-                </a:solidFill>
-                <a:latin typeface="Calibri"/>
-              </a:rPr>
-              <a:t>Data &amp; baselines</a:t>
-            </a:r>
-          </a:p>
-        </p:txBody>
-      </p:sp>
-      <p:sp>
-        <p:nvSpPr>
-          <p:cNvPr id="11" name="TextBox 10"/>
-          <p:cNvSpPr txBox="1"/>
-          <p:nvPr/>
-        </p:nvSpPr>
-        <p:spPr>
-          <a:xfrm>
-            <a:off x="1188720" y="2395727"/>
-            <a:ext cx="1965960" cy="548640"/>
-          </a:xfrm>
-          <a:prstGeom prst="rect">
-            <a:avLst/>
-          </a:prstGeom>
-          <a:noFill/>
-        </p:spPr>
-        <p:txBody>
-          <a:bodyPr wrap="square" lIns="0" tIns="0" rIns="0" bIns="0" anchor="t">
-            <a:spAutoFit/>
-          </a:bodyPr>
-          <a:lstStyle/>
-          <a:p>
-            <a:pPr algn="l">
-              <a:spcBef>
-                <a:spcPts val="0"/>
-              </a:spcBef>
-              <a:spcAft>
-                <a:spcPts val="200"/>
-              </a:spcAft>
-            </a:pPr>
-            <a:r>
-              <a:rPr sz="1100" b="0" i="0">
-                <a:solidFill>
-                  <a:srgbClr val="CBD5E1"/>
-                </a:solidFill>
-                <a:latin typeface="Calibri"/>
-              </a:rPr>
-              <a:t>Two-pipeline data, FinBERT scoring, initial Hybrid.</a:t>
-            </a:r>
-          </a:p>
-        </p:txBody>
-      </p:sp>
-      <p:sp>
-        <p:nvSpPr>
-          <p:cNvPr id="12" name="Oval 11"/>
+              <a:t>✓</a:t>
+            </a:r>
+          </a:p>
+        </p:txBody>
+      </p:sp>
+      <p:sp>
+        <p:nvSpPr>
+          <p:cNvPr id="14" name="Rounded Rectangle 13"/>
           <p:cNvSpPr/>
           <p:nvPr/>
         </p:nvSpPr>
         <p:spPr>
           <a:xfrm>
-            <a:off x="4604004" y="3099816"/>
-            <a:ext cx="274320" cy="274320"/>
-          </a:xfrm>
-          <a:prstGeom prst="ellipse">
-            <a:avLst/>
+            <a:off x="3611880" y="3703320"/>
+            <a:ext cx="2286000" cy="1371600"/>
+          </a:xfrm>
+          <a:prstGeom prst="roundRect">
+            <a:avLst>
+              <a:gd name="adj" fmla="val 8000"/>
+            </a:avLst>
           </a:prstGeom>
           <a:solidFill>
-            <a:srgbClr val="0891B2"/>
+            <a:srgbClr val="1E2738"/>
           </a:solidFill>
           <a:ln>
             <a:noFill/>
@@ -31973,14 +32668,14 @@
       </p:sp>
       <p:sp>
         <p:nvSpPr>
-          <p:cNvPr id="13" name="TextBox 12"/>
+          <p:cNvPr id="15" name="TextBox 14"/>
           <p:cNvSpPr txBox="1"/>
           <p:nvPr/>
         </p:nvSpPr>
         <p:spPr>
           <a:xfrm>
-            <a:off x="4604004" y="3081528"/>
-            <a:ext cx="274320" cy="274320"/>
+            <a:off x="3794760" y="3867911"/>
+            <a:ext cx="1965960" cy="176972"/>
           </a:xfrm>
           <a:prstGeom prst="rect">
             <a:avLst/>
@@ -31988,12 +32683,12 @@
           <a:noFill/>
         </p:spPr>
         <p:txBody>
-          <a:bodyPr wrap="square" lIns="0" tIns="0" rIns="0" bIns="0" anchor="ctr">
+          <a:bodyPr wrap="square" lIns="0" tIns="0" rIns="0" bIns="0" anchor="t">
             <a:spAutoFit/>
           </a:bodyPr>
           <a:lstStyle/>
           <a:p>
-            <a:pPr algn="ctr">
+            <a:pPr algn="l">
               <a:spcBef>
                 <a:spcPts val="0"/>
               </a:spcBef>
@@ -32002,35 +32697,126 @@
               </a:spcAft>
             </a:pPr>
             <a:r>
-              <a:rPr sz="1300" b="1" i="0">
-                <a:solidFill>
-                  <a:srgbClr val="FFFFFF"/>
+              <a:rPr lang="en-US" sz="1150" b="1" i="0" dirty="0">
+                <a:solidFill>
+                  <a:srgbClr val="0891B2"/>
                 </a:solidFill>
                 <a:latin typeface="Calibri"/>
               </a:rPr>
-              <a:t>✓</a:t>
-            </a:r>
-          </a:p>
-        </p:txBody>
-      </p:sp>
-      <p:sp>
-        <p:nvSpPr>
-          <p:cNvPr id="14" name="Rounded Rectangle 13"/>
+              <a:t>Jun</a:t>
+            </a:r>
+            <a:r>
+              <a:rPr sz="1150" b="1" i="0" dirty="0">
+                <a:solidFill>
+                  <a:srgbClr val="0891B2"/>
+                </a:solidFill>
+                <a:latin typeface="Calibri"/>
+              </a:rPr>
+              <a:t> 2026</a:t>
+            </a:r>
+          </a:p>
+        </p:txBody>
+      </p:sp>
+      <p:sp>
+        <p:nvSpPr>
+          <p:cNvPr id="16" name="TextBox 15"/>
+          <p:cNvSpPr txBox="1"/>
+          <p:nvPr/>
+        </p:nvSpPr>
+        <p:spPr>
+          <a:xfrm>
+            <a:off x="3794760" y="4160520"/>
+            <a:ext cx="1965960" cy="274320"/>
+          </a:xfrm>
+          <a:prstGeom prst="rect">
+            <a:avLst/>
+          </a:prstGeom>
+          <a:noFill/>
+        </p:spPr>
+        <p:txBody>
+          <a:bodyPr wrap="square" lIns="0" tIns="0" rIns="0" bIns="0" anchor="t">
+            <a:spAutoFit/>
+          </a:bodyPr>
+          <a:lstStyle/>
+          <a:p>
+            <a:pPr algn="l">
+              <a:spcBef>
+                <a:spcPts val="0"/>
+              </a:spcBef>
+              <a:spcAft>
+                <a:spcPts val="200"/>
+              </a:spcAft>
+            </a:pPr>
+            <a:r>
+              <a:rPr sz="1250" b="1" i="0">
+                <a:solidFill>
+                  <a:srgbClr val="FFFFFF"/>
+                </a:solidFill>
+                <a:latin typeface="Calibri"/>
+              </a:rPr>
+              <a:t>Mid-term (now)</a:t>
+            </a:r>
+          </a:p>
+        </p:txBody>
+      </p:sp>
+      <p:sp>
+        <p:nvSpPr>
+          <p:cNvPr id="17" name="TextBox 16"/>
+          <p:cNvSpPr txBox="1"/>
+          <p:nvPr/>
+        </p:nvSpPr>
+        <p:spPr>
+          <a:xfrm>
+            <a:off x="3794760" y="4453128"/>
+            <a:ext cx="1965960" cy="548640"/>
+          </a:xfrm>
+          <a:prstGeom prst="rect">
+            <a:avLst/>
+          </a:prstGeom>
+          <a:noFill/>
+        </p:spPr>
+        <p:txBody>
+          <a:bodyPr wrap="square" lIns="0" tIns="0" rIns="0" bIns="0" anchor="t">
+            <a:spAutoFit/>
+          </a:bodyPr>
+          <a:lstStyle/>
+          <a:p>
+            <a:pPr algn="l">
+              <a:spcBef>
+                <a:spcPts val="0"/>
+              </a:spcBef>
+              <a:spcAft>
+                <a:spcPts val="200"/>
+              </a:spcAft>
+            </a:pPr>
+            <a:r>
+              <a:rPr sz="1100" b="0" i="0">
+                <a:solidFill>
+                  <a:srgbClr val="CBD5E1"/>
+                </a:solidFill>
+                <a:latin typeface="Calibri"/>
+              </a:rPr>
+              <a:t>Full Hybrid, ARIMA/GARCH baselines, honest results.</a:t>
+            </a:r>
+          </a:p>
+        </p:txBody>
+      </p:sp>
+      <p:sp>
+        <p:nvSpPr>
+          <p:cNvPr id="18" name="Oval 17"/>
           <p:cNvSpPr/>
           <p:nvPr/>
         </p:nvSpPr>
         <p:spPr>
           <a:xfrm>
-            <a:off x="3611880" y="3703320"/>
-            <a:ext cx="2286000" cy="1371600"/>
-          </a:xfrm>
-          <a:prstGeom prst="roundRect">
-            <a:avLst>
-              <a:gd name="adj" fmla="val 8000"/>
-            </a:avLst>
+            <a:off x="7210044" y="3099816"/>
+            <a:ext cx="274320" cy="274320"/>
+          </a:xfrm>
+          <a:prstGeom prst="ellipse">
+            <a:avLst/>
           </a:prstGeom>
           <a:solidFill>
-            <a:srgbClr val="1E2738"/>
+            <a:srgbClr val="2563EB"/>
           </a:solidFill>
           <a:ln>
             <a:noFill/>
@@ -32062,146 +32848,22 @@
       </p:sp>
       <p:sp>
         <p:nvSpPr>
-          <p:cNvPr id="15" name="TextBox 14"/>
-          <p:cNvSpPr txBox="1"/>
-          <p:nvPr/>
-        </p:nvSpPr>
-        <p:spPr>
-          <a:xfrm>
-            <a:off x="3794760" y="3867911"/>
-            <a:ext cx="1965960" cy="274320"/>
-          </a:xfrm>
-          <a:prstGeom prst="rect">
-            <a:avLst/>
-          </a:prstGeom>
-          <a:noFill/>
-        </p:spPr>
-        <p:txBody>
-          <a:bodyPr wrap="square" lIns="0" tIns="0" rIns="0" bIns="0" anchor="t">
-            <a:spAutoFit/>
-          </a:bodyPr>
-          <a:lstStyle/>
-          <a:p>
-            <a:pPr algn="l">
-              <a:spcBef>
-                <a:spcPts val="0"/>
-              </a:spcBef>
-              <a:spcAft>
-                <a:spcPts val="200"/>
-              </a:spcAft>
-            </a:pPr>
-            <a:r>
-              <a:rPr sz="1150" b="1" i="0">
-                <a:solidFill>
-                  <a:srgbClr val="0891B2"/>
-                </a:solidFill>
-                <a:latin typeface="Calibri"/>
-              </a:rPr>
-              <a:t>Jul 2026</a:t>
-            </a:r>
-          </a:p>
-        </p:txBody>
-      </p:sp>
-      <p:sp>
-        <p:nvSpPr>
-          <p:cNvPr id="16" name="TextBox 15"/>
-          <p:cNvSpPr txBox="1"/>
-          <p:nvPr/>
-        </p:nvSpPr>
-        <p:spPr>
-          <a:xfrm>
-            <a:off x="3794760" y="4160520"/>
-            <a:ext cx="1965960" cy="274320"/>
-          </a:xfrm>
-          <a:prstGeom prst="rect">
-            <a:avLst/>
-          </a:prstGeom>
-          <a:noFill/>
-        </p:spPr>
-        <p:txBody>
-          <a:bodyPr wrap="square" lIns="0" tIns="0" rIns="0" bIns="0" anchor="t">
-            <a:spAutoFit/>
-          </a:bodyPr>
-          <a:lstStyle/>
-          <a:p>
-            <a:pPr algn="l">
-              <a:spcBef>
-                <a:spcPts val="0"/>
-              </a:spcBef>
-              <a:spcAft>
-                <a:spcPts val="200"/>
-              </a:spcAft>
-            </a:pPr>
-            <a:r>
-              <a:rPr sz="1250" b="1" i="0">
-                <a:solidFill>
-                  <a:srgbClr val="FFFFFF"/>
-                </a:solidFill>
-                <a:latin typeface="Calibri"/>
-              </a:rPr>
-              <a:t>Mid-term (now)</a:t>
-            </a:r>
-          </a:p>
-        </p:txBody>
-      </p:sp>
-      <p:sp>
-        <p:nvSpPr>
-          <p:cNvPr id="17" name="TextBox 16"/>
-          <p:cNvSpPr txBox="1"/>
-          <p:nvPr/>
-        </p:nvSpPr>
-        <p:spPr>
-          <a:xfrm>
-            <a:off x="3794760" y="4453128"/>
-            <a:ext cx="1965960" cy="548640"/>
-          </a:xfrm>
-          <a:prstGeom prst="rect">
-            <a:avLst/>
-          </a:prstGeom>
-          <a:noFill/>
-        </p:spPr>
-        <p:txBody>
-          <a:bodyPr wrap="square" lIns="0" tIns="0" rIns="0" bIns="0" anchor="t">
-            <a:spAutoFit/>
-          </a:bodyPr>
-          <a:lstStyle/>
-          <a:p>
-            <a:pPr algn="l">
-              <a:spcBef>
-                <a:spcPts val="0"/>
-              </a:spcBef>
-              <a:spcAft>
-                <a:spcPts val="200"/>
-              </a:spcAft>
-            </a:pPr>
-            <a:r>
-              <a:rPr sz="1100" b="0" i="0">
-                <a:solidFill>
-                  <a:srgbClr val="CBD5E1"/>
-                </a:solidFill>
-                <a:latin typeface="Calibri"/>
-              </a:rPr>
-              <a:t>Full Hybrid, ARIMA/GARCH baselines, honest results.</a:t>
-            </a:r>
-          </a:p>
-        </p:txBody>
-      </p:sp>
-      <p:sp>
-        <p:nvSpPr>
-          <p:cNvPr id="18" name="Oval 17"/>
+          <p:cNvPr id="19" name="Rounded Rectangle 18"/>
           <p:cNvSpPr/>
           <p:nvPr/>
         </p:nvSpPr>
         <p:spPr>
           <a:xfrm>
-            <a:off x="7210044" y="3099816"/>
-            <a:ext cx="274320" cy="274320"/>
-          </a:xfrm>
-          <a:prstGeom prst="ellipse">
-            <a:avLst/>
+            <a:off x="6217920" y="1645919"/>
+            <a:ext cx="2286000" cy="1371600"/>
+          </a:xfrm>
+          <a:prstGeom prst="roundRect">
+            <a:avLst>
+              <a:gd name="adj" fmla="val 8000"/>
+            </a:avLst>
           </a:prstGeom>
           <a:solidFill>
-            <a:srgbClr val="2563EB"/>
+            <a:srgbClr val="1E2738"/>
           </a:solidFill>
           <a:ln>
             <a:noFill/>
@@ -32233,22 +32895,176 @@
       </p:sp>
       <p:sp>
         <p:nvSpPr>
-          <p:cNvPr id="19" name="Rounded Rectangle 18"/>
+          <p:cNvPr id="20" name="TextBox 19"/>
+          <p:cNvSpPr txBox="1"/>
+          <p:nvPr/>
+        </p:nvSpPr>
+        <p:spPr>
+          <a:xfrm>
+            <a:off x="6400800" y="1810511"/>
+            <a:ext cx="1965960" cy="176972"/>
+          </a:xfrm>
+          <a:prstGeom prst="rect">
+            <a:avLst/>
+          </a:prstGeom>
+          <a:noFill/>
+        </p:spPr>
+        <p:txBody>
+          <a:bodyPr wrap="square" lIns="0" tIns="0" rIns="0" bIns="0" anchor="t">
+            <a:spAutoFit/>
+          </a:bodyPr>
+          <a:lstStyle/>
+          <a:p>
+            <a:pPr algn="l">
+              <a:spcBef>
+                <a:spcPts val="0"/>
+              </a:spcBef>
+              <a:spcAft>
+                <a:spcPts val="200"/>
+              </a:spcAft>
+            </a:pPr>
+            <a:r>
+              <a:rPr lang="en-US" sz="1150" b="1" i="0" dirty="0">
+                <a:solidFill>
+                  <a:srgbClr val="2563EB"/>
+                </a:solidFill>
+                <a:latin typeface="Calibri"/>
+              </a:rPr>
+              <a:t>Jun</a:t>
+            </a:r>
+            <a:r>
+              <a:rPr sz="1150" b="1" i="0" dirty="0">
+                <a:solidFill>
+                  <a:srgbClr val="2563EB"/>
+                </a:solidFill>
+                <a:latin typeface="Calibri"/>
+              </a:rPr>
+              <a:t> – </a:t>
+            </a:r>
+            <a:r>
+              <a:rPr lang="en-US" sz="1150" b="1" dirty="0">
+                <a:solidFill>
+                  <a:srgbClr val="2563EB"/>
+                </a:solidFill>
+                <a:latin typeface="Calibri"/>
+              </a:rPr>
+              <a:t>Jul</a:t>
+            </a:r>
+            <a:r>
+              <a:rPr sz="1150" b="1" i="0" dirty="0">
+                <a:solidFill>
+                  <a:srgbClr val="2563EB"/>
+                </a:solidFill>
+                <a:latin typeface="Calibri"/>
+              </a:rPr>
+              <a:t> 2026</a:t>
+            </a:r>
+          </a:p>
+        </p:txBody>
+      </p:sp>
+      <p:sp>
+        <p:nvSpPr>
+          <p:cNvPr id="21" name="TextBox 20"/>
+          <p:cNvSpPr txBox="1"/>
+          <p:nvPr/>
+        </p:nvSpPr>
+        <p:spPr>
+          <a:xfrm>
+            <a:off x="6400800" y="2103120"/>
+            <a:ext cx="1965960" cy="274320"/>
+          </a:xfrm>
+          <a:prstGeom prst="rect">
+            <a:avLst/>
+          </a:prstGeom>
+          <a:noFill/>
+        </p:spPr>
+        <p:txBody>
+          <a:bodyPr wrap="square" lIns="0" tIns="0" rIns="0" bIns="0" anchor="t">
+            <a:spAutoFit/>
+          </a:bodyPr>
+          <a:lstStyle/>
+          <a:p>
+            <a:pPr algn="l">
+              <a:spcBef>
+                <a:spcPts val="0"/>
+              </a:spcBef>
+              <a:spcAft>
+                <a:spcPts val="200"/>
+              </a:spcAft>
+            </a:pPr>
+            <a:r>
+              <a:rPr sz="1250" b="1" i="0">
+                <a:solidFill>
+                  <a:srgbClr val="FFFFFF"/>
+                </a:solidFill>
+                <a:latin typeface="Calibri"/>
+              </a:rPr>
+              <a:t>Deepening</a:t>
+            </a:r>
+          </a:p>
+        </p:txBody>
+      </p:sp>
+      <p:sp>
+        <p:nvSpPr>
+          <p:cNvPr id="22" name="TextBox 21"/>
+          <p:cNvSpPr txBox="1"/>
+          <p:nvPr/>
+        </p:nvSpPr>
+        <p:spPr>
+          <a:xfrm>
+            <a:off x="6400800" y="2395727"/>
+            <a:ext cx="1965960" cy="548640"/>
+          </a:xfrm>
+          <a:prstGeom prst="rect">
+            <a:avLst/>
+          </a:prstGeom>
+          <a:noFill/>
+        </p:spPr>
+        <p:txBody>
+          <a:bodyPr wrap="square" lIns="0" tIns="0" rIns="0" bIns="0" anchor="t">
+            <a:spAutoFit/>
+          </a:bodyPr>
+          <a:lstStyle/>
+          <a:p>
+            <a:pPr algn="l">
+              <a:spcBef>
+                <a:spcPts val="0"/>
+              </a:spcBef>
+              <a:spcAft>
+                <a:spcPts val="200"/>
+              </a:spcAft>
+            </a:pPr>
+            <a:r>
+              <a:rPr sz="1100" b="0" i="0">
+                <a:solidFill>
+                  <a:srgbClr val="CBD5E1"/>
+                </a:solidFill>
+                <a:latin typeface="Calibri"/>
+              </a:rPr>
+              <a:t>XAI, LLM sentiment, ablations, multi-pair.</a:t>
+            </a:r>
+          </a:p>
+        </p:txBody>
+      </p:sp>
+      <p:sp>
+        <p:nvSpPr>
+          <p:cNvPr id="23" name="Oval 22"/>
           <p:cNvSpPr/>
           <p:nvPr/>
         </p:nvSpPr>
         <p:spPr>
           <a:xfrm>
-            <a:off x="6217920" y="1645919"/>
-            <a:ext cx="2286000" cy="1371600"/>
-          </a:xfrm>
-          <a:prstGeom prst="roundRect">
-            <a:avLst>
-              <a:gd name="adj" fmla="val 8000"/>
-            </a:avLst>
+            <a:off x="9816084" y="3099816"/>
+            <a:ext cx="274320" cy="274320"/>
+          </a:xfrm>
+          <a:prstGeom prst="ellipse">
+            <a:avLst/>
           </a:prstGeom>
           <a:solidFill>
-            <a:srgbClr val="1E2738"/>
+            <a:schemeClr val="accent2">
+              <a:lumMod val="40000"/>
+              <a:lumOff val="60000"/>
+            </a:schemeClr>
           </a:solidFill>
           <a:ln>
             <a:noFill/>
@@ -32280,146 +33096,22 @@
       </p:sp>
       <p:sp>
         <p:nvSpPr>
-          <p:cNvPr id="20" name="TextBox 19"/>
-          <p:cNvSpPr txBox="1"/>
-          <p:nvPr/>
-        </p:nvSpPr>
-        <p:spPr>
-          <a:xfrm>
-            <a:off x="6400800" y="1810511"/>
-            <a:ext cx="1965960" cy="274320"/>
-          </a:xfrm>
-          <a:prstGeom prst="rect">
-            <a:avLst/>
-          </a:prstGeom>
-          <a:noFill/>
-        </p:spPr>
-        <p:txBody>
-          <a:bodyPr wrap="square" lIns="0" tIns="0" rIns="0" bIns="0" anchor="t">
-            <a:spAutoFit/>
-          </a:bodyPr>
-          <a:lstStyle/>
-          <a:p>
-            <a:pPr algn="l">
-              <a:spcBef>
-                <a:spcPts val="0"/>
-              </a:spcBef>
-              <a:spcAft>
-                <a:spcPts val="200"/>
-              </a:spcAft>
-            </a:pPr>
-            <a:r>
-              <a:rPr sz="1150" b="1" i="0">
-                <a:solidFill>
-                  <a:srgbClr val="2563EB"/>
-                </a:solidFill>
-                <a:latin typeface="Calibri"/>
-              </a:rPr>
-              <a:t>Aug – Sep 2026</a:t>
-            </a:r>
-          </a:p>
-        </p:txBody>
-      </p:sp>
-      <p:sp>
-        <p:nvSpPr>
-          <p:cNvPr id="21" name="TextBox 20"/>
-          <p:cNvSpPr txBox="1"/>
-          <p:nvPr/>
-        </p:nvSpPr>
-        <p:spPr>
-          <a:xfrm>
-            <a:off x="6400800" y="2103120"/>
-            <a:ext cx="1965960" cy="274320"/>
-          </a:xfrm>
-          <a:prstGeom prst="rect">
-            <a:avLst/>
-          </a:prstGeom>
-          <a:noFill/>
-        </p:spPr>
-        <p:txBody>
-          <a:bodyPr wrap="square" lIns="0" tIns="0" rIns="0" bIns="0" anchor="t">
-            <a:spAutoFit/>
-          </a:bodyPr>
-          <a:lstStyle/>
-          <a:p>
-            <a:pPr algn="l">
-              <a:spcBef>
-                <a:spcPts val="0"/>
-              </a:spcBef>
-              <a:spcAft>
-                <a:spcPts val="200"/>
-              </a:spcAft>
-            </a:pPr>
-            <a:r>
-              <a:rPr sz="1250" b="1" i="0">
-                <a:solidFill>
-                  <a:srgbClr val="FFFFFF"/>
-                </a:solidFill>
-                <a:latin typeface="Calibri"/>
-              </a:rPr>
-              <a:t>Deepening</a:t>
-            </a:r>
-          </a:p>
-        </p:txBody>
-      </p:sp>
-      <p:sp>
-        <p:nvSpPr>
-          <p:cNvPr id="22" name="TextBox 21"/>
-          <p:cNvSpPr txBox="1"/>
-          <p:nvPr/>
-        </p:nvSpPr>
-        <p:spPr>
-          <a:xfrm>
-            <a:off x="6400800" y="2395727"/>
-            <a:ext cx="1965960" cy="548640"/>
-          </a:xfrm>
-          <a:prstGeom prst="rect">
-            <a:avLst/>
-          </a:prstGeom>
-          <a:noFill/>
-        </p:spPr>
-        <p:txBody>
-          <a:bodyPr wrap="square" lIns="0" tIns="0" rIns="0" bIns="0" anchor="t">
-            <a:spAutoFit/>
-          </a:bodyPr>
-          <a:lstStyle/>
-          <a:p>
-            <a:pPr algn="l">
-              <a:spcBef>
-                <a:spcPts val="0"/>
-              </a:spcBef>
-              <a:spcAft>
-                <a:spcPts val="200"/>
-              </a:spcAft>
-            </a:pPr>
-            <a:r>
-              <a:rPr sz="1100" b="0" i="0">
-                <a:solidFill>
-                  <a:srgbClr val="CBD5E1"/>
-                </a:solidFill>
-                <a:latin typeface="Calibri"/>
-              </a:rPr>
-              <a:t>XAI, LLM sentiment, ablations, multi-pair.</a:t>
-            </a:r>
-          </a:p>
-        </p:txBody>
-      </p:sp>
-      <p:sp>
-        <p:nvSpPr>
-          <p:cNvPr id="23" name="Oval 22"/>
+          <p:cNvPr id="24" name="Rounded Rectangle 23"/>
           <p:cNvSpPr/>
           <p:nvPr/>
         </p:nvSpPr>
         <p:spPr>
           <a:xfrm>
-            <a:off x="9816084" y="3099816"/>
-            <a:ext cx="274320" cy="274320"/>
-          </a:xfrm>
-          <a:prstGeom prst="ellipse">
-            <a:avLst/>
+            <a:off x="8823960" y="3703320"/>
+            <a:ext cx="2286000" cy="1371600"/>
+          </a:xfrm>
+          <a:prstGeom prst="roundRect">
+            <a:avLst>
+              <a:gd name="adj" fmla="val 8000"/>
+            </a:avLst>
           </a:prstGeom>
           <a:solidFill>
-            <a:srgbClr val="B45409"/>
+            <a:srgbClr val="1E2738"/>
           </a:solidFill>
           <a:ln>
             <a:noFill/>
@@ -32451,53 +33143,6 @@
       </p:sp>
       <p:sp>
         <p:nvSpPr>
-          <p:cNvPr id="24" name="Rounded Rectangle 23"/>
-          <p:cNvSpPr/>
-          <p:nvPr/>
-        </p:nvSpPr>
-        <p:spPr>
-          <a:xfrm>
-            <a:off x="8823960" y="3703320"/>
-            <a:ext cx="2286000" cy="1371600"/>
-          </a:xfrm>
-          <a:prstGeom prst="roundRect">
-            <a:avLst>
-              <a:gd name="adj" fmla="val 8000"/>
-            </a:avLst>
-          </a:prstGeom>
-          <a:solidFill>
-            <a:srgbClr val="1E2738"/>
-          </a:solidFill>
-          <a:ln>
-            <a:noFill/>
-          </a:ln>
-          <a:effectLst/>
-        </p:spPr>
-        <p:style>
-          <a:lnRef idx="1">
-            <a:schemeClr val="accent1"/>
-          </a:lnRef>
-          <a:fillRef idx="3">
-            <a:schemeClr val="accent1"/>
-          </a:fillRef>
-          <a:effectRef idx="2">
-            <a:schemeClr val="accent1"/>
-          </a:effectRef>
-          <a:fontRef idx="minor">
-            <a:schemeClr val="lt1"/>
-          </a:fontRef>
-        </p:style>
-        <p:txBody>
-          <a:bodyPr rtlCol="0" anchor="ctr"/>
-          <a:lstStyle/>
-          <a:p>
-            <a:pPr algn="ctr"/>
-            <a:endParaRPr/>
-          </a:p>
-        </p:txBody>
-      </p:sp>
-      <p:sp>
-        <p:nvSpPr>
           <p:cNvPr id="25" name="TextBox 24"/>
           <p:cNvSpPr txBox="1"/>
           <p:nvPr/>
@@ -32505,7 +33150,7 @@
         <p:spPr>
           <a:xfrm>
             <a:off x="9006840" y="3867911"/>
-            <a:ext cx="1965960" cy="274320"/>
+            <a:ext cx="1965960" cy="176972"/>
           </a:xfrm>
           <a:prstGeom prst="rect">
             <a:avLst/>
@@ -32527,14 +33172,26 @@
               </a:spcAft>
             </a:pPr>
             <a:r>
-              <a:rPr sz="1150" b="1" i="0">
-                <a:solidFill>
-                  <a:srgbClr val="B45409"/>
+              <a:rPr lang="en-US" sz="1150" b="1" i="0" dirty="0">
+                <a:solidFill>
+                  <a:schemeClr val="accent2">
+                    <a:lumMod val="40000"/>
+                    <a:lumOff val="60000"/>
+                  </a:schemeClr>
                 </a:solidFill>
                 <a:latin typeface="Calibri"/>
               </a:rPr>
-              <a:t>Oct – Nov 2026</a:t>
-            </a:r>
+              <a:t>Aug - 2026</a:t>
+            </a:r>
+            <a:endParaRPr sz="1150" b="1" i="0" dirty="0">
+              <a:solidFill>
+                <a:schemeClr val="accent2">
+                  <a:lumMod val="40000"/>
+                  <a:lumOff val="60000"/>
+                </a:schemeClr>
+              </a:solidFill>
+              <a:latin typeface="Calibri"/>
+            </a:endParaRPr>
           </a:p>
         </p:txBody>
       </p:sp>
@@ -32618,6 +33275,301 @@
                 <a:latin typeface="Calibri"/>
               </a:rPr>
               <a:t>RL execution, full evaluation, dissertation.</a:t>
+            </a:r>
+          </a:p>
+        </p:txBody>
+      </p:sp>
+      <p:sp>
+        <p:nvSpPr>
+          <p:cNvPr id="28" name="Title 1">
+            <a:extLst>
+              <a:ext uri="{FF2B5EF4-FFF2-40B4-BE49-F238E27FC236}">
+                <a16:creationId xmlns:a16="http://schemas.microsoft.com/office/drawing/2014/main" id="{7B72222D-5609-8A15-7B5B-5F0C72708BF3}"/>
+              </a:ext>
+            </a:extLst>
+          </p:cNvPr>
+          <p:cNvSpPr txBox="1">
+            <a:spLocks/>
+          </p:cNvSpPr>
+          <p:nvPr/>
+        </p:nvSpPr>
+        <p:spPr>
+          <a:xfrm>
+            <a:off x="425196" y="396903"/>
+            <a:ext cx="6228806" cy="640940"/>
+          </a:xfrm>
+          <a:prstGeom prst="rect">
+            <a:avLst/>
+          </a:prstGeom>
+          <a:noFill/>
+          <a:ln>
+            <a:noFill/>
+          </a:ln>
+        </p:spPr>
+        <p:txBody>
+          <a:bodyPr spcFirstLastPara="1" wrap="square" lIns="91425" tIns="45700" rIns="91425" bIns="45700" anchor="ctr" anchorCtr="0">
+            <a:normAutofit/>
+          </a:bodyPr>
+          <a:lstStyle>
+            <a:defPPr marR="0" lvl="0" algn="l" rtl="0">
+              <a:lnSpc>
+                <a:spcPct val="100000"/>
+              </a:lnSpc>
+              <a:spcBef>
+                <a:spcPts val="0"/>
+              </a:spcBef>
+              <a:spcAft>
+                <a:spcPts val="0"/>
+              </a:spcAft>
+            </a:defPPr>
+            <a:lvl1pPr marR="0" lvl="0" algn="ctr" rtl="0">
+              <a:lnSpc>
+                <a:spcPct val="100000"/>
+              </a:lnSpc>
+              <a:spcBef>
+                <a:spcPts val="0"/>
+              </a:spcBef>
+              <a:spcAft>
+                <a:spcPts val="0"/>
+              </a:spcAft>
+              <a:buClr>
+                <a:schemeClr val="dk1"/>
+              </a:buClr>
+              <a:buSzPts val="1800"/>
+              <a:buFont typeface="Calibri"/>
+              <a:buNone/>
+              <a:defRPr sz="4400" b="0" i="0" u="none" strike="noStrike" cap="none">
+                <a:solidFill>
+                  <a:schemeClr val="dk1"/>
+                </a:solidFill>
+                <a:latin typeface="Calibri"/>
+                <a:ea typeface="Calibri"/>
+                <a:cs typeface="Calibri"/>
+                <a:sym typeface="Calibri"/>
+              </a:defRPr>
+            </a:lvl1pPr>
+            <a:lvl2pPr marR="0" lvl="1" algn="l" rtl="0">
+              <a:lnSpc>
+                <a:spcPct val="100000"/>
+              </a:lnSpc>
+              <a:spcBef>
+                <a:spcPts val="0"/>
+              </a:spcBef>
+              <a:spcAft>
+                <a:spcPts val="0"/>
+              </a:spcAft>
+              <a:buClr>
+                <a:srgbClr val="000000"/>
+              </a:buClr>
+              <a:buSzPts val="1400"/>
+              <a:buFont typeface="Arial"/>
+              <a:buNone/>
+              <a:defRPr sz="1800" b="0" i="0" u="none" strike="noStrike" cap="none">
+                <a:solidFill>
+                  <a:srgbClr val="000000"/>
+                </a:solidFill>
+                <a:latin typeface="Arial"/>
+                <a:ea typeface="Arial"/>
+                <a:cs typeface="Arial"/>
+                <a:sym typeface="Arial"/>
+              </a:defRPr>
+            </a:lvl2pPr>
+            <a:lvl3pPr marR="0" lvl="2" algn="l" rtl="0">
+              <a:lnSpc>
+                <a:spcPct val="100000"/>
+              </a:lnSpc>
+              <a:spcBef>
+                <a:spcPts val="0"/>
+              </a:spcBef>
+              <a:spcAft>
+                <a:spcPts val="0"/>
+              </a:spcAft>
+              <a:buClr>
+                <a:srgbClr val="000000"/>
+              </a:buClr>
+              <a:buSzPts val="1400"/>
+              <a:buFont typeface="Arial"/>
+              <a:buNone/>
+              <a:defRPr sz="1800" b="0" i="0" u="none" strike="noStrike" cap="none">
+                <a:solidFill>
+                  <a:srgbClr val="000000"/>
+                </a:solidFill>
+                <a:latin typeface="Arial"/>
+                <a:ea typeface="Arial"/>
+                <a:cs typeface="Arial"/>
+                <a:sym typeface="Arial"/>
+              </a:defRPr>
+            </a:lvl3pPr>
+            <a:lvl4pPr marR="0" lvl="3" algn="l" rtl="0">
+              <a:lnSpc>
+                <a:spcPct val="100000"/>
+              </a:lnSpc>
+              <a:spcBef>
+                <a:spcPts val="0"/>
+              </a:spcBef>
+              <a:spcAft>
+                <a:spcPts val="0"/>
+              </a:spcAft>
+              <a:buClr>
+                <a:srgbClr val="000000"/>
+              </a:buClr>
+              <a:buSzPts val="1400"/>
+              <a:buFont typeface="Arial"/>
+              <a:buNone/>
+              <a:defRPr sz="1800" b="0" i="0" u="none" strike="noStrike" cap="none">
+                <a:solidFill>
+                  <a:srgbClr val="000000"/>
+                </a:solidFill>
+                <a:latin typeface="Arial"/>
+                <a:ea typeface="Arial"/>
+                <a:cs typeface="Arial"/>
+                <a:sym typeface="Arial"/>
+              </a:defRPr>
+            </a:lvl4pPr>
+            <a:lvl5pPr marR="0" lvl="4" algn="l" rtl="0">
+              <a:lnSpc>
+                <a:spcPct val="100000"/>
+              </a:lnSpc>
+              <a:spcBef>
+                <a:spcPts val="0"/>
+              </a:spcBef>
+              <a:spcAft>
+                <a:spcPts val="0"/>
+              </a:spcAft>
+              <a:buClr>
+                <a:srgbClr val="000000"/>
+              </a:buClr>
+              <a:buSzPts val="1400"/>
+              <a:buFont typeface="Arial"/>
+              <a:buNone/>
+              <a:defRPr sz="1800" b="0" i="0" u="none" strike="noStrike" cap="none">
+                <a:solidFill>
+                  <a:srgbClr val="000000"/>
+                </a:solidFill>
+                <a:latin typeface="Arial"/>
+                <a:ea typeface="Arial"/>
+                <a:cs typeface="Arial"/>
+                <a:sym typeface="Arial"/>
+              </a:defRPr>
+            </a:lvl5pPr>
+            <a:lvl6pPr marR="0" lvl="5" algn="l" rtl="0">
+              <a:lnSpc>
+                <a:spcPct val="100000"/>
+              </a:lnSpc>
+              <a:spcBef>
+                <a:spcPts val="0"/>
+              </a:spcBef>
+              <a:spcAft>
+                <a:spcPts val="0"/>
+              </a:spcAft>
+              <a:buClr>
+                <a:srgbClr val="000000"/>
+              </a:buClr>
+              <a:buSzPts val="1400"/>
+              <a:buFont typeface="Arial"/>
+              <a:buNone/>
+              <a:defRPr sz="1800" b="0" i="0" u="none" strike="noStrike" cap="none">
+                <a:solidFill>
+                  <a:srgbClr val="000000"/>
+                </a:solidFill>
+                <a:latin typeface="Arial"/>
+                <a:ea typeface="Arial"/>
+                <a:cs typeface="Arial"/>
+                <a:sym typeface="Arial"/>
+              </a:defRPr>
+            </a:lvl6pPr>
+            <a:lvl7pPr marR="0" lvl="6" algn="l" rtl="0">
+              <a:lnSpc>
+                <a:spcPct val="100000"/>
+              </a:lnSpc>
+              <a:spcBef>
+                <a:spcPts val="0"/>
+              </a:spcBef>
+              <a:spcAft>
+                <a:spcPts val="0"/>
+              </a:spcAft>
+              <a:buClr>
+                <a:srgbClr val="000000"/>
+              </a:buClr>
+              <a:buSzPts val="1400"/>
+              <a:buFont typeface="Arial"/>
+              <a:buNone/>
+              <a:defRPr sz="1800" b="0" i="0" u="none" strike="noStrike" cap="none">
+                <a:solidFill>
+                  <a:srgbClr val="000000"/>
+                </a:solidFill>
+                <a:latin typeface="Arial"/>
+                <a:ea typeface="Arial"/>
+                <a:cs typeface="Arial"/>
+                <a:sym typeface="Arial"/>
+              </a:defRPr>
+            </a:lvl7pPr>
+            <a:lvl8pPr marR="0" lvl="7" algn="l" rtl="0">
+              <a:lnSpc>
+                <a:spcPct val="100000"/>
+              </a:lnSpc>
+              <a:spcBef>
+                <a:spcPts val="0"/>
+              </a:spcBef>
+              <a:spcAft>
+                <a:spcPts val="0"/>
+              </a:spcAft>
+              <a:buClr>
+                <a:srgbClr val="000000"/>
+              </a:buClr>
+              <a:buSzPts val="1400"/>
+              <a:buFont typeface="Arial"/>
+              <a:buNone/>
+              <a:defRPr sz="1800" b="0" i="0" u="none" strike="noStrike" cap="none">
+                <a:solidFill>
+                  <a:srgbClr val="000000"/>
+                </a:solidFill>
+                <a:latin typeface="Arial"/>
+                <a:ea typeface="Arial"/>
+                <a:cs typeface="Arial"/>
+                <a:sym typeface="Arial"/>
+              </a:defRPr>
+            </a:lvl8pPr>
+            <a:lvl9pPr marR="0" lvl="8" algn="l" rtl="0">
+              <a:lnSpc>
+                <a:spcPct val="100000"/>
+              </a:lnSpc>
+              <a:spcBef>
+                <a:spcPts val="0"/>
+              </a:spcBef>
+              <a:spcAft>
+                <a:spcPts val="0"/>
+              </a:spcAft>
+              <a:buClr>
+                <a:srgbClr val="000000"/>
+              </a:buClr>
+              <a:buSzPts val="1400"/>
+              <a:buFont typeface="Arial"/>
+              <a:buNone/>
+              <a:defRPr sz="1800" b="0" i="0" u="none" strike="noStrike" cap="none">
+                <a:solidFill>
+                  <a:srgbClr val="000000"/>
+                </a:solidFill>
+                <a:latin typeface="Arial"/>
+                <a:ea typeface="Arial"/>
+                <a:cs typeface="Arial"/>
+                <a:sym typeface="Arial"/>
+              </a:defRPr>
+            </a:lvl9pPr>
+          </a:lstStyle>
+          <a:p>
+            <a:pPr algn="l"/>
+            <a:r>
+              <a:rPr lang="en-US" sz="3200" dirty="0">
+                <a:solidFill>
+                  <a:schemeClr val="bg2">
+                    <a:lumMod val="75000"/>
+                  </a:schemeClr>
+                </a:solidFill>
+                <a:latin typeface="Calibri" panose="020F0502020204030204" pitchFamily="34" charset="0"/>
+                <a:cs typeface="Calibri" panose="020F0502020204030204" pitchFamily="34" charset="0"/>
+              </a:rPr>
+              <a:t>Project Timeline</a:t>
             </a:r>
           </a:p>
         </p:txBody>
@@ -32649,20 +33601,22 @@
       </p:grpSpPr>
       <p:sp>
         <p:nvSpPr>
-          <p:cNvPr id="2" name="Rectangle 1"/>
+          <p:cNvPr id="4" name="Rounded Rectangle 3"/>
           <p:cNvSpPr/>
           <p:nvPr/>
         </p:nvSpPr>
         <p:spPr>
           <a:xfrm>
-            <a:off x="566928" y="548640"/>
-            <a:ext cx="82296" cy="502920"/>
-          </a:xfrm>
-          <a:prstGeom prst="rect">
-            <a:avLst/>
+            <a:off x="871731" y="1600200"/>
+            <a:ext cx="10515600" cy="4297680"/>
+          </a:xfrm>
+          <a:prstGeom prst="roundRect">
+            <a:avLst>
+              <a:gd name="adj" fmla="val 8000"/>
+            </a:avLst>
           </a:prstGeom>
           <a:solidFill>
-            <a:srgbClr val="2DD4BF"/>
+            <a:srgbClr val="1E2738"/>
           </a:solidFill>
           <a:ln>
             <a:noFill/>
@@ -32694,64 +33648,20 @@
       </p:sp>
       <p:sp>
         <p:nvSpPr>
-          <p:cNvPr id="3" name="TextBox 2"/>
-          <p:cNvSpPr txBox="1"/>
-          <p:nvPr/>
-        </p:nvSpPr>
-        <p:spPr>
-          <a:xfrm>
-            <a:off x="777240" y="475488"/>
-            <a:ext cx="10515600" cy="731520"/>
-          </a:xfrm>
-          <a:prstGeom prst="rect">
-            <a:avLst/>
-          </a:prstGeom>
-          <a:noFill/>
-        </p:spPr>
-        <p:txBody>
-          <a:bodyPr wrap="square" lIns="0" tIns="0" rIns="0" bIns="0" anchor="t">
-            <a:spAutoFit/>
-          </a:bodyPr>
-          <a:lstStyle/>
-          <a:p>
-            <a:pPr algn="l">
-              <a:spcBef>
-                <a:spcPts val="0"/>
-              </a:spcBef>
-              <a:spcAft>
-                <a:spcPts val="200"/>
-              </a:spcAft>
-            </a:pPr>
-            <a:r>
-              <a:rPr sz="3200" b="1" i="0">
-                <a:solidFill>
-                  <a:srgbClr val="1F3759"/>
-                </a:solidFill>
-                <a:latin typeface="Calibri"/>
-              </a:rPr>
-              <a:t>Conclusion</a:t>
-            </a:r>
-          </a:p>
-        </p:txBody>
-      </p:sp>
-      <p:sp>
-        <p:nvSpPr>
-          <p:cNvPr id="4" name="Rounded Rectangle 3"/>
+          <p:cNvPr id="5" name="Oval 4"/>
           <p:cNvSpPr/>
           <p:nvPr/>
         </p:nvSpPr>
         <p:spPr>
           <a:xfrm>
-            <a:off x="871731" y="1600200"/>
-            <a:ext cx="10515600" cy="4297680"/>
-          </a:xfrm>
-          <a:prstGeom prst="roundRect">
-            <a:avLst>
-              <a:gd name="adj" fmla="val 8000"/>
-            </a:avLst>
+            <a:off x="1219203" y="1993391"/>
+            <a:ext cx="310896" cy="310896"/>
+          </a:xfrm>
+          <a:prstGeom prst="ellipse">
+            <a:avLst/>
           </a:prstGeom>
           <a:solidFill>
-            <a:srgbClr val="1E2738"/>
+            <a:srgbClr val="2DD4BF"/>
           </a:solidFill>
           <a:ln>
             <a:noFill/>
@@ -32783,20 +33693,146 @@
       </p:sp>
       <p:sp>
         <p:nvSpPr>
-          <p:cNvPr id="5" name="Oval 4"/>
+          <p:cNvPr id="6" name="TextBox 5"/>
+          <p:cNvSpPr txBox="1"/>
+          <p:nvPr/>
+        </p:nvSpPr>
+        <p:spPr>
+          <a:xfrm>
+            <a:off x="1219203" y="1984248"/>
+            <a:ext cx="310896" cy="310896"/>
+          </a:xfrm>
+          <a:prstGeom prst="rect">
+            <a:avLst/>
+          </a:prstGeom>
+          <a:noFill/>
+        </p:spPr>
+        <p:txBody>
+          <a:bodyPr wrap="square" lIns="0" tIns="0" rIns="0" bIns="0" anchor="ctr">
+            <a:spAutoFit/>
+          </a:bodyPr>
+          <a:lstStyle/>
+          <a:p>
+            <a:pPr algn="ctr">
+              <a:spcBef>
+                <a:spcPts val="0"/>
+              </a:spcBef>
+              <a:spcAft>
+                <a:spcPts val="200"/>
+              </a:spcAft>
+            </a:pPr>
+            <a:r>
+              <a:rPr sz="1500" b="1" i="0">
+                <a:solidFill>
+                  <a:srgbClr val="FFFFFF"/>
+                </a:solidFill>
+                <a:latin typeface="Calibri"/>
+              </a:rPr>
+              <a:t>1</a:t>
+            </a:r>
+          </a:p>
+        </p:txBody>
+      </p:sp>
+      <p:sp>
+        <p:nvSpPr>
+          <p:cNvPr id="7" name="TextBox 6"/>
+          <p:cNvSpPr txBox="1"/>
+          <p:nvPr/>
+        </p:nvSpPr>
+        <p:spPr>
+          <a:xfrm>
+            <a:off x="1767843" y="1920240"/>
+            <a:ext cx="9784080" cy="365760"/>
+          </a:xfrm>
+          <a:prstGeom prst="rect">
+            <a:avLst/>
+          </a:prstGeom>
+          <a:noFill/>
+        </p:spPr>
+        <p:txBody>
+          <a:bodyPr wrap="square" lIns="0" tIns="0" rIns="0" bIns="0" anchor="t">
+            <a:spAutoFit/>
+          </a:bodyPr>
+          <a:lstStyle/>
+          <a:p>
+            <a:pPr algn="l">
+              <a:spcBef>
+                <a:spcPts val="0"/>
+              </a:spcBef>
+              <a:spcAft>
+                <a:spcPts val="200"/>
+              </a:spcAft>
+            </a:pPr>
+            <a:r>
+              <a:rPr sz="1500" b="1" i="0">
+                <a:solidFill>
+                  <a:srgbClr val="2DD4BF"/>
+                </a:solidFill>
+                <a:latin typeface="Calibri"/>
+              </a:rPr>
+              <a:t>Built an end-to-end multi-modal FX forecaster</a:t>
+            </a:r>
+          </a:p>
+        </p:txBody>
+      </p:sp>
+      <p:sp>
+        <p:nvSpPr>
+          <p:cNvPr id="8" name="TextBox 7"/>
+          <p:cNvSpPr txBox="1"/>
+          <p:nvPr/>
+        </p:nvSpPr>
+        <p:spPr>
+          <a:xfrm>
+            <a:off x="1767843" y="2276856"/>
+            <a:ext cx="9784080" cy="548640"/>
+          </a:xfrm>
+          <a:prstGeom prst="rect">
+            <a:avLst/>
+          </a:prstGeom>
+          <a:noFill/>
+        </p:spPr>
+        <p:txBody>
+          <a:bodyPr wrap="square" lIns="0" tIns="0" rIns="0" bIns="0" anchor="t">
+            <a:spAutoFit/>
+          </a:bodyPr>
+          <a:lstStyle/>
+          <a:p>
+            <a:pPr algn="l">
+              <a:spcBef>
+                <a:spcPts val="0"/>
+              </a:spcBef>
+              <a:spcAft>
+                <a:spcPts val="200"/>
+              </a:spcAft>
+            </a:pPr>
+            <a:r>
+              <a:rPr sz="1200" b="0" i="0">
+                <a:solidFill>
+                  <a:srgbClr val="CBD5E1"/>
+                </a:solidFill>
+                <a:latin typeface="Calibri"/>
+              </a:rPr>
+              <a:t>Real price, macro and FinBERT-sentiment streams feed a dual-tower Hybrid CNN-LSTM-Transformer with regime-aware probabilistic outputs.</a:t>
+            </a:r>
+          </a:p>
+        </p:txBody>
+      </p:sp>
+      <p:sp>
+        <p:nvSpPr>
+          <p:cNvPr id="9" name="Oval 8"/>
           <p:cNvSpPr/>
           <p:nvPr/>
         </p:nvSpPr>
         <p:spPr>
           <a:xfrm>
-            <a:off x="1219203" y="1993391"/>
+            <a:off x="1219203" y="2953512"/>
             <a:ext cx="310896" cy="310896"/>
           </a:xfrm>
           <a:prstGeom prst="ellipse">
             <a:avLst/>
           </a:prstGeom>
           <a:solidFill>
-            <a:srgbClr val="2DD4BF"/>
+            <a:srgbClr val="0891B2"/>
           </a:solidFill>
           <a:ln>
             <a:noFill/>
@@ -32828,13 +33864,13 @@
       </p:sp>
       <p:sp>
         <p:nvSpPr>
-          <p:cNvPr id="6" name="TextBox 5"/>
+          <p:cNvPr id="10" name="TextBox 9"/>
           <p:cNvSpPr txBox="1"/>
           <p:nvPr/>
         </p:nvSpPr>
         <p:spPr>
           <a:xfrm>
-            <a:off x="1219203" y="1984248"/>
+            <a:off x="1219203" y="2944368"/>
             <a:ext cx="310896" cy="310896"/>
           </a:xfrm>
           <a:prstGeom prst="rect">
@@ -32863,20 +33899,20 @@
                 </a:solidFill>
                 <a:latin typeface="Calibri"/>
               </a:rPr>
-              <a:t>1</a:t>
-            </a:r>
-          </a:p>
-        </p:txBody>
-      </p:sp>
-      <p:sp>
-        <p:nvSpPr>
-          <p:cNvPr id="7" name="TextBox 6"/>
+              <a:t>2</a:t>
+            </a:r>
+          </a:p>
+        </p:txBody>
+      </p:sp>
+      <p:sp>
+        <p:nvSpPr>
+          <p:cNvPr id="11" name="TextBox 10"/>
           <p:cNvSpPr txBox="1"/>
           <p:nvPr/>
         </p:nvSpPr>
         <p:spPr>
           <a:xfrm>
-            <a:off x="1767843" y="1920240"/>
+            <a:off x="1767843" y="2880360"/>
             <a:ext cx="9784080" cy="365760"/>
           </a:xfrm>
           <a:prstGeom prst="rect">
@@ -32905,20 +33941,20 @@
                 </a:solidFill>
                 <a:latin typeface="Calibri"/>
               </a:rPr>
-              <a:t>Built an end-to-end multi-modal FX forecaster</a:t>
-            </a:r>
-          </a:p>
-        </p:txBody>
-      </p:sp>
-      <p:sp>
-        <p:nvSpPr>
-          <p:cNvPr id="8" name="TextBox 7"/>
+              <a:t>Closed the three literature-survey gaps</a:t>
+            </a:r>
+          </a:p>
+        </p:txBody>
+      </p:sp>
+      <p:sp>
+        <p:nvSpPr>
+          <p:cNvPr id="12" name="TextBox 11"/>
           <p:cNvSpPr txBox="1"/>
           <p:nvPr/>
         </p:nvSpPr>
         <p:spPr>
           <a:xfrm>
-            <a:off x="1767843" y="2276856"/>
+            <a:off x="1767843" y="3236976"/>
             <a:ext cx="9784080" cy="548640"/>
           </a:xfrm>
           <a:prstGeom prst="rect">
@@ -32947,27 +33983,27 @@
                 </a:solidFill>
                 <a:latin typeface="Calibri"/>
               </a:rPr>
-              <a:t>Real price, macro and FinBERT-sentiment streams feed a dual-tower Hybrid CNN-LSTM-Transformer with regime-aware probabilistic outputs.</a:t>
-            </a:r>
-          </a:p>
-        </p:txBody>
-      </p:sp>
-      <p:sp>
-        <p:nvSpPr>
-          <p:cNvPr id="9" name="Oval 8"/>
+              <a:t>One unified hybrid (not separate pipelines), explicit multi-step forecasting, and a regime-aware evaluation lens.</a:t>
+            </a:r>
+          </a:p>
+        </p:txBody>
+      </p:sp>
+      <p:sp>
+        <p:nvSpPr>
+          <p:cNvPr id="13" name="Oval 12"/>
           <p:cNvSpPr/>
           <p:nvPr/>
         </p:nvSpPr>
         <p:spPr>
           <a:xfrm>
-            <a:off x="1219203" y="2953512"/>
+            <a:off x="1219203" y="3913632"/>
             <a:ext cx="310896" cy="310896"/>
           </a:xfrm>
           <a:prstGeom prst="ellipse">
             <a:avLst/>
           </a:prstGeom>
           <a:solidFill>
-            <a:srgbClr val="0891B2"/>
+            <a:srgbClr val="2563EB"/>
           </a:solidFill>
           <a:ln>
             <a:noFill/>
@@ -32999,13 +34035,13 @@
       </p:sp>
       <p:sp>
         <p:nvSpPr>
-          <p:cNvPr id="10" name="TextBox 9"/>
+          <p:cNvPr id="14" name="TextBox 13"/>
           <p:cNvSpPr txBox="1"/>
           <p:nvPr/>
         </p:nvSpPr>
         <p:spPr>
           <a:xfrm>
-            <a:off x="1219203" y="2944368"/>
+            <a:off x="1219203" y="3904487"/>
             <a:ext cx="310896" cy="310896"/>
           </a:xfrm>
           <a:prstGeom prst="rect">
@@ -33034,20 +34070,20 @@
                 </a:solidFill>
                 <a:latin typeface="Calibri"/>
               </a:rPr>
-              <a:t>2</a:t>
-            </a:r>
-          </a:p>
-        </p:txBody>
-      </p:sp>
-      <p:sp>
-        <p:nvSpPr>
-          <p:cNvPr id="11" name="TextBox 10"/>
+              <a:t>3</a:t>
+            </a:r>
+          </a:p>
+        </p:txBody>
+      </p:sp>
+      <p:sp>
+        <p:nvSpPr>
+          <p:cNvPr id="15" name="TextBox 14"/>
           <p:cNvSpPr txBox="1"/>
           <p:nvPr/>
         </p:nvSpPr>
         <p:spPr>
           <a:xfrm>
-            <a:off x="1767843" y="2880360"/>
+            <a:off x="1767843" y="3840480"/>
             <a:ext cx="9784080" cy="365760"/>
           </a:xfrm>
           <a:prstGeom prst="rect">
@@ -33076,20 +34112,20 @@
                 </a:solidFill>
                 <a:latin typeface="Calibri"/>
               </a:rPr>
-              <a:t>Closed the three literature-survey gaps</a:t>
-            </a:r>
-          </a:p>
-        </p:txBody>
-      </p:sp>
-      <p:sp>
-        <p:nvSpPr>
-          <p:cNvPr id="12" name="TextBox 11"/>
+              <a:t>Honest, leakage-free benchmarking</a:t>
+            </a:r>
+          </a:p>
+        </p:txBody>
+      </p:sp>
+      <p:sp>
+        <p:nvSpPr>
+          <p:cNvPr id="16" name="TextBox 15"/>
           <p:cNvSpPr txBox="1"/>
           <p:nvPr/>
         </p:nvSpPr>
         <p:spPr>
           <a:xfrm>
-            <a:off x="1767843" y="3236976"/>
+            <a:off x="1767843" y="4197096"/>
             <a:ext cx="9784080" cy="548640"/>
           </a:xfrm>
           <a:prstGeom prst="rect">
@@ -33118,27 +34154,27 @@
                 </a:solidFill>
                 <a:latin typeface="Calibri"/>
               </a:rPr>
-              <a:t>One unified hybrid (not separate pipelines), explicit multi-step forecasting, and a regime-aware evaluation lens.</a:t>
-            </a:r>
-          </a:p>
-        </p:txBody>
-      </p:sp>
-      <p:sp>
-        <p:nvSpPr>
-          <p:cNvPr id="13" name="Oval 12"/>
+              <a:t>GARCH leads raw direction on trending gold; the Hybrid's edge is its conviction machinery and a positive costed backtest.</a:t>
+            </a:r>
+          </a:p>
+        </p:txBody>
+      </p:sp>
+      <p:sp>
+        <p:nvSpPr>
+          <p:cNvPr id="17" name="Oval 16"/>
           <p:cNvSpPr/>
           <p:nvPr/>
         </p:nvSpPr>
         <p:spPr>
           <a:xfrm>
-            <a:off x="1219203" y="3913632"/>
+            <a:off x="1219203" y="4873752"/>
             <a:ext cx="310896" cy="310896"/>
           </a:xfrm>
           <a:prstGeom prst="ellipse">
             <a:avLst/>
           </a:prstGeom>
           <a:solidFill>
-            <a:srgbClr val="2563EB"/>
+            <a:srgbClr val="059669"/>
           </a:solidFill>
           <a:ln>
             <a:noFill/>
@@ -33170,13 +34206,13 @@
       </p:sp>
       <p:sp>
         <p:nvSpPr>
-          <p:cNvPr id="14" name="TextBox 13"/>
+          <p:cNvPr id="18" name="TextBox 17"/>
           <p:cNvSpPr txBox="1"/>
           <p:nvPr/>
         </p:nvSpPr>
         <p:spPr>
           <a:xfrm>
-            <a:off x="1219203" y="3904487"/>
+            <a:off x="1219203" y="4864608"/>
             <a:ext cx="310896" cy="310896"/>
           </a:xfrm>
           <a:prstGeom prst="rect">
@@ -33205,20 +34241,20 @@
                 </a:solidFill>
                 <a:latin typeface="Calibri"/>
               </a:rPr>
-              <a:t>3</a:t>
-            </a:r>
-          </a:p>
-        </p:txBody>
-      </p:sp>
-      <p:sp>
-        <p:nvSpPr>
-          <p:cNvPr id="15" name="TextBox 14"/>
+              <a:t>4</a:t>
+            </a:r>
+          </a:p>
+        </p:txBody>
+      </p:sp>
+      <p:sp>
+        <p:nvSpPr>
+          <p:cNvPr id="19" name="TextBox 18"/>
           <p:cNvSpPr txBox="1"/>
           <p:nvPr/>
         </p:nvSpPr>
         <p:spPr>
           <a:xfrm>
-            <a:off x="1767843" y="3840480"/>
+            <a:off x="1767843" y="4800600"/>
             <a:ext cx="9784080" cy="365760"/>
           </a:xfrm>
           <a:prstGeom prst="rect">
@@ -33247,20 +34283,20 @@
                 </a:solidFill>
                 <a:latin typeface="Calibri"/>
               </a:rPr>
-              <a:t>Honest, leakage-free benchmarking</a:t>
-            </a:r>
-          </a:p>
-        </p:txBody>
-      </p:sp>
-      <p:sp>
-        <p:nvSpPr>
-          <p:cNvPr id="16" name="TextBox 15"/>
+              <a:t>Clear path forward</a:t>
+            </a:r>
+          </a:p>
+        </p:txBody>
+      </p:sp>
+      <p:sp>
+        <p:nvSpPr>
+          <p:cNvPr id="20" name="TextBox 19"/>
           <p:cNvSpPr txBox="1"/>
           <p:nvPr/>
         </p:nvSpPr>
         <p:spPr>
           <a:xfrm>
-            <a:off x="1767843" y="4197096"/>
+            <a:off x="1767843" y="5157216"/>
             <a:ext cx="9784080" cy="548640"/>
           </a:xfrm>
           <a:prstGeom prst="rect">
@@ -33289,178 +34325,302 @@
                 </a:solidFill>
                 <a:latin typeface="Calibri"/>
               </a:rPr>
-              <a:t>GARCH leads raw direction on trending gold; the Hybrid's edge is its conviction machinery and a positive costed backtest.</a:t>
-            </a:r>
-          </a:p>
-        </p:txBody>
-      </p:sp>
-      <p:sp>
-        <p:nvSpPr>
-          <p:cNvPr id="17" name="Oval 16"/>
-          <p:cNvSpPr/>
+              <a:t>XAI, denser sentiment via keyed APIs &amp; LLMs, ablation studies and an RL execution layer toward final submission.</a:t>
+            </a:r>
+          </a:p>
+        </p:txBody>
+      </p:sp>
+      <p:sp>
+        <p:nvSpPr>
+          <p:cNvPr id="21" name="Title 1">
+            <a:extLst>
+              <a:ext uri="{FF2B5EF4-FFF2-40B4-BE49-F238E27FC236}">
+                <a16:creationId xmlns:a16="http://schemas.microsoft.com/office/drawing/2014/main" id="{F9355B3C-7B6C-E189-AA9C-379BF1225F5C}"/>
+              </a:ext>
+            </a:extLst>
+          </p:cNvPr>
+          <p:cNvSpPr txBox="1">
+            <a:spLocks/>
+          </p:cNvSpPr>
           <p:nvPr/>
         </p:nvSpPr>
         <p:spPr>
           <a:xfrm>
-            <a:off x="1219203" y="4873752"/>
-            <a:ext cx="310896" cy="310896"/>
-          </a:xfrm>
-          <a:prstGeom prst="ellipse">
+            <a:off x="500745" y="478770"/>
+            <a:ext cx="6228806" cy="640940"/>
+          </a:xfrm>
+          <a:prstGeom prst="rect">
             <a:avLst/>
           </a:prstGeom>
-          <a:solidFill>
-            <a:srgbClr val="059669"/>
-          </a:solidFill>
+          <a:noFill/>
           <a:ln>
             <a:noFill/>
           </a:ln>
-          <a:effectLst/>
-        </p:spPr>
-        <p:style>
-          <a:lnRef idx="1">
-            <a:schemeClr val="accent1"/>
-          </a:lnRef>
-          <a:fillRef idx="3">
-            <a:schemeClr val="accent1"/>
-          </a:fillRef>
-          <a:effectRef idx="2">
-            <a:schemeClr val="accent1"/>
-          </a:effectRef>
-          <a:fontRef idx="minor">
-            <a:schemeClr val="lt1"/>
-          </a:fontRef>
-        </p:style>
-        <p:txBody>
-          <a:bodyPr rtlCol="0" anchor="ctr"/>
-          <a:lstStyle/>
-          <a:p>
-            <a:pPr algn="ctr"/>
-            <a:endParaRPr/>
-          </a:p>
-        </p:txBody>
-      </p:sp>
-      <p:sp>
-        <p:nvSpPr>
-          <p:cNvPr id="18" name="TextBox 17"/>
-          <p:cNvSpPr txBox="1"/>
-          <p:nvPr/>
-        </p:nvSpPr>
-        <p:spPr>
-          <a:xfrm>
-            <a:off x="1219203" y="4864608"/>
-            <a:ext cx="310896" cy="310896"/>
-          </a:xfrm>
-          <a:prstGeom prst="rect">
-            <a:avLst/>
-          </a:prstGeom>
-          <a:noFill/>
-        </p:spPr>
-        <p:txBody>
-          <a:bodyPr wrap="square" lIns="0" tIns="0" rIns="0" bIns="0" anchor="ctr">
-            <a:spAutoFit/>
+        </p:spPr>
+        <p:txBody>
+          <a:bodyPr spcFirstLastPara="1" wrap="square" lIns="91425" tIns="45700" rIns="91425" bIns="45700" anchor="ctr" anchorCtr="0">
+            <a:normAutofit/>
           </a:bodyPr>
-          <a:lstStyle/>
-          <a:p>
-            <a:pPr algn="ctr">
-              <a:spcBef>
-                <a:spcPts val="0"/>
-              </a:spcBef>
-              <a:spcAft>
-                <a:spcPts val="200"/>
-              </a:spcAft>
-            </a:pPr>
-            <a:r>
-              <a:rPr sz="1500" b="1" i="0">
-                <a:solidFill>
-                  <a:srgbClr val="FFFFFF"/>
+          <a:lstStyle>
+            <a:defPPr marR="0" lvl="0" algn="l" rtl="0">
+              <a:lnSpc>
+                <a:spcPct val="100000"/>
+              </a:lnSpc>
+              <a:spcBef>
+                <a:spcPts val="0"/>
+              </a:spcBef>
+              <a:spcAft>
+                <a:spcPts val="0"/>
+              </a:spcAft>
+            </a:defPPr>
+            <a:lvl1pPr marR="0" lvl="0" algn="ctr" rtl="0">
+              <a:lnSpc>
+                <a:spcPct val="100000"/>
+              </a:lnSpc>
+              <a:spcBef>
+                <a:spcPts val="0"/>
+              </a:spcBef>
+              <a:spcAft>
+                <a:spcPts val="0"/>
+              </a:spcAft>
+              <a:buClr>
+                <a:schemeClr val="dk1"/>
+              </a:buClr>
+              <a:buSzPts val="1800"/>
+              <a:buFont typeface="Calibri"/>
+              <a:buNone/>
+              <a:defRPr sz="4400" b="0" i="0" u="none" strike="noStrike" cap="none">
+                <a:solidFill>
+                  <a:schemeClr val="dk1"/>
                 </a:solidFill>
                 <a:latin typeface="Calibri"/>
+                <a:ea typeface="Calibri"/>
+                <a:cs typeface="Calibri"/>
+                <a:sym typeface="Calibri"/>
+              </a:defRPr>
+            </a:lvl1pPr>
+            <a:lvl2pPr marR="0" lvl="1" algn="l" rtl="0">
+              <a:lnSpc>
+                <a:spcPct val="100000"/>
+              </a:lnSpc>
+              <a:spcBef>
+                <a:spcPts val="0"/>
+              </a:spcBef>
+              <a:spcAft>
+                <a:spcPts val="0"/>
+              </a:spcAft>
+              <a:buClr>
+                <a:srgbClr val="000000"/>
+              </a:buClr>
+              <a:buSzPts val="1400"/>
+              <a:buFont typeface="Arial"/>
+              <a:buNone/>
+              <a:defRPr sz="1800" b="0" i="0" u="none" strike="noStrike" cap="none">
+                <a:solidFill>
+                  <a:srgbClr val="000000"/>
+                </a:solidFill>
+                <a:latin typeface="Arial"/>
+                <a:ea typeface="Arial"/>
+                <a:cs typeface="Arial"/>
+                <a:sym typeface="Arial"/>
+              </a:defRPr>
+            </a:lvl2pPr>
+            <a:lvl3pPr marR="0" lvl="2" algn="l" rtl="0">
+              <a:lnSpc>
+                <a:spcPct val="100000"/>
+              </a:lnSpc>
+              <a:spcBef>
+                <a:spcPts val="0"/>
+              </a:spcBef>
+              <a:spcAft>
+                <a:spcPts val="0"/>
+              </a:spcAft>
+              <a:buClr>
+                <a:srgbClr val="000000"/>
+              </a:buClr>
+              <a:buSzPts val="1400"/>
+              <a:buFont typeface="Arial"/>
+              <a:buNone/>
+              <a:defRPr sz="1800" b="0" i="0" u="none" strike="noStrike" cap="none">
+                <a:solidFill>
+                  <a:srgbClr val="000000"/>
+                </a:solidFill>
+                <a:latin typeface="Arial"/>
+                <a:ea typeface="Arial"/>
+                <a:cs typeface="Arial"/>
+                <a:sym typeface="Arial"/>
+              </a:defRPr>
+            </a:lvl3pPr>
+            <a:lvl4pPr marR="0" lvl="3" algn="l" rtl="0">
+              <a:lnSpc>
+                <a:spcPct val="100000"/>
+              </a:lnSpc>
+              <a:spcBef>
+                <a:spcPts val="0"/>
+              </a:spcBef>
+              <a:spcAft>
+                <a:spcPts val="0"/>
+              </a:spcAft>
+              <a:buClr>
+                <a:srgbClr val="000000"/>
+              </a:buClr>
+              <a:buSzPts val="1400"/>
+              <a:buFont typeface="Arial"/>
+              <a:buNone/>
+              <a:defRPr sz="1800" b="0" i="0" u="none" strike="noStrike" cap="none">
+                <a:solidFill>
+                  <a:srgbClr val="000000"/>
+                </a:solidFill>
+                <a:latin typeface="Arial"/>
+                <a:ea typeface="Arial"/>
+                <a:cs typeface="Arial"/>
+                <a:sym typeface="Arial"/>
+              </a:defRPr>
+            </a:lvl4pPr>
+            <a:lvl5pPr marR="0" lvl="4" algn="l" rtl="0">
+              <a:lnSpc>
+                <a:spcPct val="100000"/>
+              </a:lnSpc>
+              <a:spcBef>
+                <a:spcPts val="0"/>
+              </a:spcBef>
+              <a:spcAft>
+                <a:spcPts val="0"/>
+              </a:spcAft>
+              <a:buClr>
+                <a:srgbClr val="000000"/>
+              </a:buClr>
+              <a:buSzPts val="1400"/>
+              <a:buFont typeface="Arial"/>
+              <a:buNone/>
+              <a:defRPr sz="1800" b="0" i="0" u="none" strike="noStrike" cap="none">
+                <a:solidFill>
+                  <a:srgbClr val="000000"/>
+                </a:solidFill>
+                <a:latin typeface="Arial"/>
+                <a:ea typeface="Arial"/>
+                <a:cs typeface="Arial"/>
+                <a:sym typeface="Arial"/>
+              </a:defRPr>
+            </a:lvl5pPr>
+            <a:lvl6pPr marR="0" lvl="5" algn="l" rtl="0">
+              <a:lnSpc>
+                <a:spcPct val="100000"/>
+              </a:lnSpc>
+              <a:spcBef>
+                <a:spcPts val="0"/>
+              </a:spcBef>
+              <a:spcAft>
+                <a:spcPts val="0"/>
+              </a:spcAft>
+              <a:buClr>
+                <a:srgbClr val="000000"/>
+              </a:buClr>
+              <a:buSzPts val="1400"/>
+              <a:buFont typeface="Arial"/>
+              <a:buNone/>
+              <a:defRPr sz="1800" b="0" i="0" u="none" strike="noStrike" cap="none">
+                <a:solidFill>
+                  <a:srgbClr val="000000"/>
+                </a:solidFill>
+                <a:latin typeface="Arial"/>
+                <a:ea typeface="Arial"/>
+                <a:cs typeface="Arial"/>
+                <a:sym typeface="Arial"/>
+              </a:defRPr>
+            </a:lvl6pPr>
+            <a:lvl7pPr marR="0" lvl="6" algn="l" rtl="0">
+              <a:lnSpc>
+                <a:spcPct val="100000"/>
+              </a:lnSpc>
+              <a:spcBef>
+                <a:spcPts val="0"/>
+              </a:spcBef>
+              <a:spcAft>
+                <a:spcPts val="0"/>
+              </a:spcAft>
+              <a:buClr>
+                <a:srgbClr val="000000"/>
+              </a:buClr>
+              <a:buSzPts val="1400"/>
+              <a:buFont typeface="Arial"/>
+              <a:buNone/>
+              <a:defRPr sz="1800" b="0" i="0" u="none" strike="noStrike" cap="none">
+                <a:solidFill>
+                  <a:srgbClr val="000000"/>
+                </a:solidFill>
+                <a:latin typeface="Arial"/>
+                <a:ea typeface="Arial"/>
+                <a:cs typeface="Arial"/>
+                <a:sym typeface="Arial"/>
+              </a:defRPr>
+            </a:lvl7pPr>
+            <a:lvl8pPr marR="0" lvl="7" algn="l" rtl="0">
+              <a:lnSpc>
+                <a:spcPct val="100000"/>
+              </a:lnSpc>
+              <a:spcBef>
+                <a:spcPts val="0"/>
+              </a:spcBef>
+              <a:spcAft>
+                <a:spcPts val="0"/>
+              </a:spcAft>
+              <a:buClr>
+                <a:srgbClr val="000000"/>
+              </a:buClr>
+              <a:buSzPts val="1400"/>
+              <a:buFont typeface="Arial"/>
+              <a:buNone/>
+              <a:defRPr sz="1800" b="0" i="0" u="none" strike="noStrike" cap="none">
+                <a:solidFill>
+                  <a:srgbClr val="000000"/>
+                </a:solidFill>
+                <a:latin typeface="Arial"/>
+                <a:ea typeface="Arial"/>
+                <a:cs typeface="Arial"/>
+                <a:sym typeface="Arial"/>
+              </a:defRPr>
+            </a:lvl8pPr>
+            <a:lvl9pPr marR="0" lvl="8" algn="l" rtl="0">
+              <a:lnSpc>
+                <a:spcPct val="100000"/>
+              </a:lnSpc>
+              <a:spcBef>
+                <a:spcPts val="0"/>
+              </a:spcBef>
+              <a:spcAft>
+                <a:spcPts val="0"/>
+              </a:spcAft>
+              <a:buClr>
+                <a:srgbClr val="000000"/>
+              </a:buClr>
+              <a:buSzPts val="1400"/>
+              <a:buFont typeface="Arial"/>
+              <a:buNone/>
+              <a:defRPr sz="1800" b="0" i="0" u="none" strike="noStrike" cap="none">
+                <a:solidFill>
+                  <a:srgbClr val="000000"/>
+                </a:solidFill>
+                <a:latin typeface="Arial"/>
+                <a:ea typeface="Arial"/>
+                <a:cs typeface="Arial"/>
+                <a:sym typeface="Arial"/>
+              </a:defRPr>
+            </a:lvl9pPr>
+          </a:lstStyle>
+          <a:p>
+            <a:pPr algn="l"/>
+            <a:r>
+              <a:rPr lang="en-US" sz="3200" dirty="0">
+                <a:solidFill>
+                  <a:schemeClr val="bg2">
+                    <a:lumMod val="75000"/>
+                  </a:schemeClr>
+                </a:solidFill>
+                <a:latin typeface="Calibri" panose="020F0502020204030204" pitchFamily="34" charset="0"/>
+                <a:cs typeface="Calibri" panose="020F0502020204030204" pitchFamily="34" charset="0"/>
               </a:rPr>
-              <a:t>4</a:t>
-            </a:r>
-          </a:p>
-        </p:txBody>
-      </p:sp>
-      <p:sp>
-        <p:nvSpPr>
-          <p:cNvPr id="19" name="TextBox 18"/>
-          <p:cNvSpPr txBox="1"/>
-          <p:nvPr/>
-        </p:nvSpPr>
-        <p:spPr>
-          <a:xfrm>
-            <a:off x="1767843" y="4800600"/>
-            <a:ext cx="9784080" cy="365760"/>
-          </a:xfrm>
-          <a:prstGeom prst="rect">
-            <a:avLst/>
-          </a:prstGeom>
-          <a:noFill/>
-        </p:spPr>
-        <p:txBody>
-          <a:bodyPr wrap="square" lIns="0" tIns="0" rIns="0" bIns="0" anchor="t">
-            <a:spAutoFit/>
-          </a:bodyPr>
-          <a:lstStyle/>
-          <a:p>
-            <a:pPr algn="l">
-              <a:spcBef>
-                <a:spcPts val="0"/>
-              </a:spcBef>
-              <a:spcAft>
-                <a:spcPts val="200"/>
-              </a:spcAft>
-            </a:pPr>
-            <a:r>
-              <a:rPr sz="1500" b="1" i="0">
-                <a:solidFill>
-                  <a:srgbClr val="2DD4BF"/>
-                </a:solidFill>
-                <a:latin typeface="Calibri"/>
-              </a:rPr>
-              <a:t>Clear path forward</a:t>
-            </a:r>
-          </a:p>
-        </p:txBody>
-      </p:sp>
-      <p:sp>
-        <p:nvSpPr>
-          <p:cNvPr id="20" name="TextBox 19"/>
-          <p:cNvSpPr txBox="1"/>
-          <p:nvPr/>
-        </p:nvSpPr>
-        <p:spPr>
-          <a:xfrm>
-            <a:off x="1767843" y="5157216"/>
-            <a:ext cx="9784080" cy="548640"/>
-          </a:xfrm>
-          <a:prstGeom prst="rect">
-            <a:avLst/>
-          </a:prstGeom>
-          <a:noFill/>
-        </p:spPr>
-        <p:txBody>
-          <a:bodyPr wrap="square" lIns="0" tIns="0" rIns="0" bIns="0" anchor="t">
-            <a:spAutoFit/>
-          </a:bodyPr>
-          <a:lstStyle/>
-          <a:p>
-            <a:pPr algn="l">
-              <a:spcBef>
-                <a:spcPts val="0"/>
-              </a:spcBef>
-              <a:spcAft>
-                <a:spcPts val="200"/>
-              </a:spcAft>
-            </a:pPr>
-            <a:r>
-              <a:rPr sz="1200" b="0" i="0">
-                <a:solidFill>
-                  <a:srgbClr val="CBD5E1"/>
-                </a:solidFill>
-                <a:latin typeface="Calibri"/>
-              </a:rPr>
-              <a:t>XAI, denser sentiment via keyed APIs &amp; LLMs, ablation studies and an RL execution layer toward final submission.</a:t>
+              <a:t>Conclusion</a:t>
             </a:r>
           </a:p>
         </p:txBody>
